--- a/slides/Module-02-Prompt-Engineering-and-RAG.pptx
+++ b/slides/Module-02-Prompt-Engineering-and-RAG.pptx
@@ -16,6 +16,7 @@
     <p:sldId id="263" r:id="rId9"/>
     <p:sldId id="264" r:id="rId10"/>
     <p:sldId id="265" r:id="rId11"/>
+    <p:sldId id="268" r:id="rId18"/>
     <p:sldId id="266" r:id="rId12"/>
   </p:sldIdLst>
   <p:sldSz cx="12192000" cy="6858000"/>
@@ -5943,7 +5944,7 @@
                 </a:solidFill>
                 <a:latin typeface="Calibri"/>
               </a:rPr>
-              <a:t>What is hallucination, and which two fixes would you apply before trusting a number?</a:t>
+              <a:t>What is hallucination, and what are its three types?</a:t>
             </a:r>
           </a:p>
           <a:p>
@@ -5971,7 +5972,7 @@
                 </a:solidFill>
                 <a:latin typeface="Calibri"/>
               </a:rPr>
-              <a:t>The model invents plausible text when it lacks facts. Any two of: give it the document, require a citation, allow “not found”, verify in Python.</a:t>
+              <a:t>A confident answer that is false. Fact: a wrong number stated with confidence. Source: invented evidence. Context: it contradicts the document it was given.</a:t>
             </a:r>
           </a:p>
         </p:txBody>
@@ -6723,7 +6724,7 @@
                 </a:solidFill>
                 <a:latin typeface="Georgia"/>
               </a:rPr>
-              <a:t>Q7</a:t>
+              <a:t>Q11</a:t>
             </a:r>
           </a:p>
         </p:txBody>
@@ -6919,7 +6920,7 @@
                 </a:solidFill>
                 <a:latin typeface="Georgia"/>
               </a:rPr>
-              <a:t>Q8</a:t>
+              <a:t>Q12</a:t>
             </a:r>
           </a:p>
         </p:txBody>
@@ -7115,7 +7116,7 @@
                 </a:solidFill>
                 <a:latin typeface="Georgia"/>
               </a:rPr>
-              <a:t>Q9</a:t>
+              <a:t>Q13</a:t>
             </a:r>
           </a:p>
         </p:txBody>
@@ -7319,6 +7320,1014 @@
       <p:sp>
         <p:nvSpPr>
           <p:cNvPr id="20" name="TextBox 19"/>
+          <p:cNvSpPr txBox="1"/>
+          <p:nvPr/>
+        </p:nvSpPr>
+        <p:spPr>
+          <a:xfrm>
+            <a:off x="9262872" y="6473952"/>
+            <a:ext cx="2377440" cy="228600"/>
+          </a:xfrm>
+          <a:prstGeom prst="rect">
+            <a:avLst/>
+          </a:prstGeom>
+          <a:noFill/>
+        </p:spPr>
+        <p:txBody>
+          <a:bodyPr wrap="square" lIns="0" tIns="0" rIns="0" bIns="0" anchor="t">
+            <a:spAutoFit/>
+          </a:bodyPr>
+          <a:lstStyle/>
+          <a:p>
+            <a:pPr algn="r">
+              <a:lnSpc>
+                <a:spcPct val="105000"/>
+              </a:lnSpc>
+            </a:pPr>
+            <a:r>
+              <a:rPr sz="800" b="0" i="0">
+                <a:solidFill>
+                  <a:srgbClr val="5D6B7E"/>
+                </a:solidFill>
+              </a:rPr>
+              <a:t>MODULE 2  ·  13</a:t>
+            </a:r>
+          </a:p>
+        </p:txBody>
+      </p:sp>
+    </p:spTree>
+  </p:cSld>
+  <p:clrMapOvr>
+    <a:masterClrMapping/>
+  </p:clrMapOvr>
+</p:sld>
+</file>
+
+<file path=ppt/slides/slide13.xml><?xml version="1.0" encoding="utf-8"?>
+<p:sld xmlns:a="http://schemas.openxmlformats.org/drawingml/2006/main" xmlns:p="http://schemas.openxmlformats.org/presentationml/2006/main" xmlns:r="http://schemas.openxmlformats.org/officeDocument/2006/relationships">
+  <p:cSld>
+    <p:bg>
+      <p:bgPr>
+        <a:solidFill>
+          <a:srgbClr val="F7F8FA"/>
+        </a:solidFill>
+        <a:effectLst/>
+      </p:bgPr>
+    </p:bg>
+    <p:spTree>
+      <p:nvGrpSpPr>
+        <p:cNvPr id="1" name=""/>
+        <p:cNvGrpSpPr/>
+        <p:nvPr/>
+      </p:nvGrpSpPr>
+      <p:grpSpPr/>
+      <p:sp>
+        <p:nvSpPr>
+          <p:cNvPr id="2" name="Rectangle 1"/>
+          <p:cNvSpPr/>
+          <p:nvPr/>
+        </p:nvSpPr>
+        <p:spPr>
+          <a:xfrm>
+            <a:off x="548640" y="402336"/>
+            <a:ext cx="118872" cy="118872"/>
+          </a:xfrm>
+          <a:prstGeom prst="rect">
+            <a:avLst/>
+          </a:prstGeom>
+          <a:solidFill>
+            <a:srgbClr val="C9A227"/>
+          </a:solidFill>
+          <a:ln>
+            <a:noFill/>
+          </a:ln>
+          <a:effectLst/>
+        </p:spPr>
+        <p:style>
+          <a:lnRef idx="1">
+            <a:schemeClr val="accent1"/>
+          </a:lnRef>
+          <a:fillRef idx="3">
+            <a:schemeClr val="accent1"/>
+          </a:fillRef>
+          <a:effectRef idx="2">
+            <a:schemeClr val="accent1"/>
+          </a:effectRef>
+          <a:fontRef idx="minor">
+            <a:schemeClr val="lt1"/>
+          </a:fontRef>
+        </p:style>
+        <p:txBody>
+          <a:bodyPr rtlCol="0" anchor="ctr"/>
+          <a:lstStyle/>
+          <a:p>
+            <a:pPr algn="ctr"/>
+            <a:endParaRPr/>
+          </a:p>
+        </p:txBody>
+      </p:sp>
+      <p:sp>
+        <p:nvSpPr>
+          <p:cNvPr id="3" name="TextBox 2"/>
+          <p:cNvSpPr txBox="1"/>
+          <p:nvPr/>
+        </p:nvSpPr>
+        <p:spPr>
+          <a:xfrm>
+            <a:off x="786384" y="306324"/>
+            <a:ext cx="10817352" cy="274320"/>
+          </a:xfrm>
+          <a:prstGeom prst="rect">
+            <a:avLst/>
+          </a:prstGeom>
+          <a:noFill/>
+        </p:spPr>
+        <p:txBody>
+          <a:bodyPr wrap="square" lIns="0" tIns="0" rIns="0" bIns="0" anchor="t">
+            <a:spAutoFit/>
+          </a:bodyPr>
+          <a:lstStyle/>
+          <a:p>
+            <a:pPr algn="l">
+              <a:lnSpc>
+                <a:spcPct val="105000"/>
+              </a:lnSpc>
+            </a:pPr>
+            <a:r>
+              <a:rPr sz="1100" b="1" i="0">
+                <a:solidFill>
+                  <a:srgbClr val="C9A227"/>
+                </a:solidFill>
+              </a:rPr>
+              <a:t>PRACTICE QUESTIONS · PART A, CONTINUED</a:t>
+            </a:r>
+          </a:p>
+        </p:txBody>
+      </p:sp>
+      <p:sp>
+        <p:nvSpPr>
+          <p:cNvPr id="4" name="TextBox 3"/>
+          <p:cNvSpPr txBox="1"/>
+          <p:nvPr/>
+        </p:nvSpPr>
+        <p:spPr>
+          <a:xfrm>
+            <a:off x="548640" y="621792"/>
+            <a:ext cx="11091672" cy="731520"/>
+          </a:xfrm>
+          <a:prstGeom prst="rect">
+            <a:avLst/>
+          </a:prstGeom>
+          <a:noFill/>
+        </p:spPr>
+        <p:txBody>
+          <a:bodyPr wrap="square" lIns="0" tIns="0" rIns="0" bIns="0" anchor="t">
+            <a:spAutoFit/>
+          </a:bodyPr>
+          <a:lstStyle/>
+          <a:p>
+            <a:pPr algn="l">
+              <a:lnSpc>
+                <a:spcPct val="105000"/>
+              </a:lnSpc>
+            </a:pPr>
+            <a:r>
+              <a:rPr sz="2900" b="1" i="0">
+                <a:solidFill>
+                  <a:srgbClr val="0F2145"/>
+                </a:solidFill>
+                <a:latin typeface="Georgia"/>
+              </a:rPr>
+              <a:t>Four more from the mid-term paper</a:t>
+            </a:r>
+          </a:p>
+        </p:txBody>
+      </p:sp>
+      <p:sp>
+        <p:nvSpPr>
+          <p:cNvPr id="5" name="Rectangle 4"/>
+          <p:cNvSpPr/>
+          <p:nvPr/>
+        </p:nvSpPr>
+        <p:spPr>
+          <a:xfrm>
+            <a:off x="548640" y="1572768"/>
+            <a:ext cx="11091672" cy="731520"/>
+          </a:xfrm>
+          <a:prstGeom prst="rect">
+            <a:avLst/>
+          </a:prstGeom>
+          <a:solidFill>
+            <a:srgbClr val="FFFFFF"/>
+          </a:solidFill>
+          <a:ln>
+            <a:noFill/>
+          </a:ln>
+          <a:effectLst/>
+        </p:spPr>
+        <p:style>
+          <a:lnRef idx="1">
+            <a:schemeClr val="accent1"/>
+          </a:lnRef>
+          <a:fillRef idx="3">
+            <a:schemeClr val="accent1"/>
+          </a:fillRef>
+          <a:effectRef idx="2">
+            <a:schemeClr val="accent1"/>
+          </a:effectRef>
+          <a:fontRef idx="minor">
+            <a:schemeClr val="lt1"/>
+          </a:fontRef>
+        </p:style>
+        <p:txBody>
+          <a:bodyPr rtlCol="0" anchor="ctr"/>
+          <a:lstStyle/>
+          <a:p>
+            <a:pPr algn="ctr"/>
+            <a:endParaRPr/>
+          </a:p>
+        </p:txBody>
+      </p:sp>
+      <p:sp>
+        <p:nvSpPr>
+          <p:cNvPr id="6" name="Rectangle 5"/>
+          <p:cNvSpPr/>
+          <p:nvPr/>
+        </p:nvSpPr>
+        <p:spPr>
+          <a:xfrm>
+            <a:off x="548640" y="1572768"/>
+            <a:ext cx="64008" cy="731520"/>
+          </a:xfrm>
+          <a:prstGeom prst="rect">
+            <a:avLst/>
+          </a:prstGeom>
+          <a:solidFill>
+            <a:srgbClr val="3A5C9E"/>
+          </a:solidFill>
+          <a:ln>
+            <a:noFill/>
+          </a:ln>
+          <a:effectLst/>
+        </p:spPr>
+        <p:style>
+          <a:lnRef idx="1">
+            <a:schemeClr val="accent1"/>
+          </a:lnRef>
+          <a:fillRef idx="3">
+            <a:schemeClr val="accent1"/>
+          </a:fillRef>
+          <a:effectRef idx="2">
+            <a:schemeClr val="accent1"/>
+          </a:effectRef>
+          <a:fontRef idx="minor">
+            <a:schemeClr val="lt1"/>
+          </a:fontRef>
+        </p:style>
+        <p:txBody>
+          <a:bodyPr rtlCol="0" anchor="ctr"/>
+          <a:lstStyle/>
+          <a:p>
+            <a:pPr algn="ctr"/>
+            <a:endParaRPr/>
+          </a:p>
+        </p:txBody>
+      </p:sp>
+      <p:sp>
+        <p:nvSpPr>
+          <p:cNvPr id="7" name="TextBox 6"/>
+          <p:cNvSpPr txBox="1"/>
+          <p:nvPr/>
+        </p:nvSpPr>
+        <p:spPr>
+          <a:xfrm>
+            <a:off x="822960" y="1655064"/>
+            <a:ext cx="640080" cy="365760"/>
+          </a:xfrm>
+          <a:prstGeom prst="rect">
+            <a:avLst/>
+          </a:prstGeom>
+          <a:noFill/>
+        </p:spPr>
+        <p:txBody>
+          <a:bodyPr wrap="square" lIns="0" tIns="0" rIns="0" bIns="0" anchor="t">
+            <a:spAutoFit/>
+          </a:bodyPr>
+          <a:lstStyle/>
+          <a:p>
+            <a:pPr algn="l">
+              <a:lnSpc>
+                <a:spcPct val="105000"/>
+              </a:lnSpc>
+            </a:pPr>
+            <a:r>
+              <a:rPr sz="1400" b="1" i="0">
+                <a:solidFill>
+                  <a:srgbClr val="3A5C9E"/>
+                </a:solidFill>
+                <a:latin typeface="Georgia"/>
+              </a:rPr>
+              <a:t>Q7</a:t>
+            </a:r>
+          </a:p>
+        </p:txBody>
+      </p:sp>
+      <p:sp>
+        <p:nvSpPr>
+          <p:cNvPr id="8" name="TextBox 7"/>
+          <p:cNvSpPr txBox="1"/>
+          <p:nvPr/>
+        </p:nvSpPr>
+        <p:spPr>
+          <a:xfrm>
+            <a:off x="1554480" y="1636776"/>
+            <a:ext cx="9875520" cy="603504"/>
+          </a:xfrm>
+          <a:prstGeom prst="rect">
+            <a:avLst/>
+          </a:prstGeom>
+          <a:noFill/>
+        </p:spPr>
+        <p:txBody>
+          <a:bodyPr wrap="square" lIns="0" tIns="0" rIns="0" bIns="0" anchor="t">
+            <a:spAutoFit/>
+          </a:bodyPr>
+          <a:lstStyle/>
+          <a:p>
+            <a:pPr algn="l">
+              <a:lnSpc>
+                <a:spcPct val="105000"/>
+              </a:lnSpc>
+            </a:pPr>
+            <a:r>
+              <a:rPr sz="1100" b="0" i="0">
+                <a:solidFill>
+                  <a:srgbClr val="1B2A41"/>
+                </a:solidFill>
+                <a:latin typeface="Calibri"/>
+              </a:rPr>
+              <a:t>What is the CRAFT prompt technique? Name the three things a role sets.</a:t>
+            </a:r>
+          </a:p>
+          <a:p>
+            <a:pPr algn="l">
+              <a:lnSpc>
+                <a:spcPct val="105000"/>
+              </a:lnSpc>
+              <a:spcBef>
+                <a:spcPts val="200"/>
+              </a:spcBef>
+            </a:pPr>
+            <a:r>
+              <a:rPr sz="900" b="1" i="0">
+                <a:solidFill>
+                  <a:srgbClr val="C9A227"/>
+                </a:solidFill>
+                <a:latin typeface="Calibri"/>
+              </a:rPr>
+              <a:t>TIP  </a:t>
+            </a:r>
+            <a:r>
+              <a:rPr sz="900" b="0" i="0">
+                <a:solidFill>
+                  <a:srgbClr val="5D6B7E"/>
+                </a:solidFill>
+                <a:latin typeface="Calibri"/>
+              </a:rPr>
+              <a:t>Context, Role, Action, Format, Tone. A role sets vocabulary, depth and audience, and it adds no new facts.</a:t>
+            </a:r>
+          </a:p>
+        </p:txBody>
+      </p:sp>
+      <p:sp>
+        <p:nvSpPr>
+          <p:cNvPr id="9" name="Rectangle 8"/>
+          <p:cNvSpPr/>
+          <p:nvPr/>
+        </p:nvSpPr>
+        <p:spPr>
+          <a:xfrm>
+            <a:off x="548640" y="2377440"/>
+            <a:ext cx="11091672" cy="731520"/>
+          </a:xfrm>
+          <a:prstGeom prst="rect">
+            <a:avLst/>
+          </a:prstGeom>
+          <a:solidFill>
+            <a:srgbClr val="FFFFFF"/>
+          </a:solidFill>
+          <a:ln>
+            <a:noFill/>
+          </a:ln>
+          <a:effectLst/>
+        </p:spPr>
+        <p:style>
+          <a:lnRef idx="1">
+            <a:schemeClr val="accent1"/>
+          </a:lnRef>
+          <a:fillRef idx="3">
+            <a:schemeClr val="accent1"/>
+          </a:fillRef>
+          <a:effectRef idx="2">
+            <a:schemeClr val="accent1"/>
+          </a:effectRef>
+          <a:fontRef idx="minor">
+            <a:schemeClr val="lt1"/>
+          </a:fontRef>
+        </p:style>
+        <p:txBody>
+          <a:bodyPr rtlCol="0" anchor="ctr"/>
+          <a:lstStyle/>
+          <a:p>
+            <a:pPr algn="ctr"/>
+            <a:endParaRPr/>
+          </a:p>
+        </p:txBody>
+      </p:sp>
+      <p:sp>
+        <p:nvSpPr>
+          <p:cNvPr id="10" name="Rectangle 9"/>
+          <p:cNvSpPr/>
+          <p:nvPr/>
+        </p:nvSpPr>
+        <p:spPr>
+          <a:xfrm>
+            <a:off x="548640" y="2377440"/>
+            <a:ext cx="64008" cy="731520"/>
+          </a:xfrm>
+          <a:prstGeom prst="rect">
+            <a:avLst/>
+          </a:prstGeom>
+          <a:solidFill>
+            <a:srgbClr val="3A5C9E"/>
+          </a:solidFill>
+          <a:ln>
+            <a:noFill/>
+          </a:ln>
+          <a:effectLst/>
+        </p:spPr>
+        <p:style>
+          <a:lnRef idx="1">
+            <a:schemeClr val="accent1"/>
+          </a:lnRef>
+          <a:fillRef idx="3">
+            <a:schemeClr val="accent1"/>
+          </a:fillRef>
+          <a:effectRef idx="2">
+            <a:schemeClr val="accent1"/>
+          </a:effectRef>
+          <a:fontRef idx="minor">
+            <a:schemeClr val="lt1"/>
+          </a:fontRef>
+        </p:style>
+        <p:txBody>
+          <a:bodyPr rtlCol="0" anchor="ctr"/>
+          <a:lstStyle/>
+          <a:p>
+            <a:pPr algn="ctr"/>
+            <a:endParaRPr/>
+          </a:p>
+        </p:txBody>
+      </p:sp>
+      <p:sp>
+        <p:nvSpPr>
+          <p:cNvPr id="11" name="TextBox 10"/>
+          <p:cNvSpPr txBox="1"/>
+          <p:nvPr/>
+        </p:nvSpPr>
+        <p:spPr>
+          <a:xfrm>
+            <a:off x="822960" y="2459736"/>
+            <a:ext cx="640080" cy="365760"/>
+          </a:xfrm>
+          <a:prstGeom prst="rect">
+            <a:avLst/>
+          </a:prstGeom>
+          <a:noFill/>
+        </p:spPr>
+        <p:txBody>
+          <a:bodyPr wrap="square" lIns="0" tIns="0" rIns="0" bIns="0" anchor="t">
+            <a:spAutoFit/>
+          </a:bodyPr>
+          <a:lstStyle/>
+          <a:p>
+            <a:pPr algn="l">
+              <a:lnSpc>
+                <a:spcPct val="105000"/>
+              </a:lnSpc>
+            </a:pPr>
+            <a:r>
+              <a:rPr sz="1400" b="1" i="0">
+                <a:solidFill>
+                  <a:srgbClr val="3A5C9E"/>
+                </a:solidFill>
+                <a:latin typeface="Georgia"/>
+              </a:rPr>
+              <a:t>Q8</a:t>
+            </a:r>
+          </a:p>
+        </p:txBody>
+      </p:sp>
+      <p:sp>
+        <p:nvSpPr>
+          <p:cNvPr id="12" name="TextBox 11"/>
+          <p:cNvSpPr txBox="1"/>
+          <p:nvPr/>
+        </p:nvSpPr>
+        <p:spPr>
+          <a:xfrm>
+            <a:off x="1554480" y="2441448"/>
+            <a:ext cx="9875520" cy="603504"/>
+          </a:xfrm>
+          <a:prstGeom prst="rect">
+            <a:avLst/>
+          </a:prstGeom>
+          <a:noFill/>
+        </p:spPr>
+        <p:txBody>
+          <a:bodyPr wrap="square" lIns="0" tIns="0" rIns="0" bIns="0" anchor="t">
+            <a:spAutoFit/>
+          </a:bodyPr>
+          <a:lstStyle/>
+          <a:p>
+            <a:pPr algn="l">
+              <a:lnSpc>
+                <a:spcPct val="105000"/>
+              </a:lnSpc>
+            </a:pPr>
+            <a:r>
+              <a:rPr sz="1100" b="0" i="0">
+                <a:solidFill>
+                  <a:srgbClr val="1B2A41"/>
+                </a:solidFill>
+                <a:latin typeface="Calibri"/>
+              </a:rPr>
+              <a:t>How will you reduce hallucination? (This was asked in an Accenture strategy interview.)</a:t>
+            </a:r>
+          </a:p>
+          <a:p>
+            <a:pPr algn="l">
+              <a:lnSpc>
+                <a:spcPct val="105000"/>
+              </a:lnSpc>
+              <a:spcBef>
+                <a:spcPts val="200"/>
+              </a:spcBef>
+            </a:pPr>
+            <a:r>
+              <a:rPr sz="900" b="1" i="0">
+                <a:solidFill>
+                  <a:srgbClr val="C9A227"/>
+                </a:solidFill>
+                <a:latin typeface="Calibri"/>
+              </a:rPr>
+              <a:t>TIP  </a:t>
+            </a:r>
+            <a:r>
+              <a:rPr sz="900" b="0" i="0">
+                <a:solidFill>
+                  <a:srgbClr val="5D6B7E"/>
+                </a:solidFill>
+                <a:latin typeface="Calibri"/>
+              </a:rPr>
+              <a:t>Give it the document (RAG), demand a page citation for every number, allow “I don't know”, fix the output format, and check every number with code.</a:t>
+            </a:r>
+          </a:p>
+        </p:txBody>
+      </p:sp>
+      <p:sp>
+        <p:nvSpPr>
+          <p:cNvPr id="13" name="Rectangle 12"/>
+          <p:cNvSpPr/>
+          <p:nvPr/>
+        </p:nvSpPr>
+        <p:spPr>
+          <a:xfrm>
+            <a:off x="548640" y="3182112"/>
+            <a:ext cx="11091672" cy="731520"/>
+          </a:xfrm>
+          <a:prstGeom prst="rect">
+            <a:avLst/>
+          </a:prstGeom>
+          <a:solidFill>
+            <a:srgbClr val="FFFFFF"/>
+          </a:solidFill>
+          <a:ln>
+            <a:noFill/>
+          </a:ln>
+          <a:effectLst/>
+        </p:spPr>
+        <p:style>
+          <a:lnRef idx="1">
+            <a:schemeClr val="accent1"/>
+          </a:lnRef>
+          <a:fillRef idx="3">
+            <a:schemeClr val="accent1"/>
+          </a:fillRef>
+          <a:effectRef idx="2">
+            <a:schemeClr val="accent1"/>
+          </a:effectRef>
+          <a:fontRef idx="minor">
+            <a:schemeClr val="lt1"/>
+          </a:fontRef>
+        </p:style>
+        <p:txBody>
+          <a:bodyPr rtlCol="0" anchor="ctr"/>
+          <a:lstStyle/>
+          <a:p>
+            <a:pPr algn="ctr"/>
+            <a:endParaRPr/>
+          </a:p>
+        </p:txBody>
+      </p:sp>
+      <p:sp>
+        <p:nvSpPr>
+          <p:cNvPr id="14" name="Rectangle 13"/>
+          <p:cNvSpPr/>
+          <p:nvPr/>
+        </p:nvSpPr>
+        <p:spPr>
+          <a:xfrm>
+            <a:off x="548640" y="3182112"/>
+            <a:ext cx="64008" cy="731520"/>
+          </a:xfrm>
+          <a:prstGeom prst="rect">
+            <a:avLst/>
+          </a:prstGeom>
+          <a:solidFill>
+            <a:srgbClr val="3A5C9E"/>
+          </a:solidFill>
+          <a:ln>
+            <a:noFill/>
+          </a:ln>
+          <a:effectLst/>
+        </p:spPr>
+        <p:style>
+          <a:lnRef idx="1">
+            <a:schemeClr val="accent1"/>
+          </a:lnRef>
+          <a:fillRef idx="3">
+            <a:schemeClr val="accent1"/>
+          </a:fillRef>
+          <a:effectRef idx="2">
+            <a:schemeClr val="accent1"/>
+          </a:effectRef>
+          <a:fontRef idx="minor">
+            <a:schemeClr val="lt1"/>
+          </a:fontRef>
+        </p:style>
+        <p:txBody>
+          <a:bodyPr rtlCol="0" anchor="ctr"/>
+          <a:lstStyle/>
+          <a:p>
+            <a:pPr algn="ctr"/>
+            <a:endParaRPr/>
+          </a:p>
+        </p:txBody>
+      </p:sp>
+      <p:sp>
+        <p:nvSpPr>
+          <p:cNvPr id="15" name="TextBox 14"/>
+          <p:cNvSpPr txBox="1"/>
+          <p:nvPr/>
+        </p:nvSpPr>
+        <p:spPr>
+          <a:xfrm>
+            <a:off x="822960" y="3264408"/>
+            <a:ext cx="640080" cy="365760"/>
+          </a:xfrm>
+          <a:prstGeom prst="rect">
+            <a:avLst/>
+          </a:prstGeom>
+          <a:noFill/>
+        </p:spPr>
+        <p:txBody>
+          <a:bodyPr wrap="square" lIns="0" tIns="0" rIns="0" bIns="0" anchor="t">
+            <a:spAutoFit/>
+          </a:bodyPr>
+          <a:lstStyle/>
+          <a:p>
+            <a:pPr algn="l">
+              <a:lnSpc>
+                <a:spcPct val="105000"/>
+              </a:lnSpc>
+            </a:pPr>
+            <a:r>
+              <a:rPr sz="1400" b="1" i="0">
+                <a:solidFill>
+                  <a:srgbClr val="3A5C9E"/>
+                </a:solidFill>
+                <a:latin typeface="Georgia"/>
+              </a:rPr>
+              <a:t>Q9</a:t>
+            </a:r>
+          </a:p>
+        </p:txBody>
+      </p:sp>
+      <p:sp>
+        <p:nvSpPr>
+          <p:cNvPr id="16" name="TextBox 15"/>
+          <p:cNvSpPr txBox="1"/>
+          <p:nvPr/>
+        </p:nvSpPr>
+        <p:spPr>
+          <a:xfrm>
+            <a:off x="1554480" y="3246120"/>
+            <a:ext cx="9875520" cy="603504"/>
+          </a:xfrm>
+          <a:prstGeom prst="rect">
+            <a:avLst/>
+          </a:prstGeom>
+          <a:noFill/>
+        </p:spPr>
+        <p:txBody>
+          <a:bodyPr wrap="square" lIns="0" tIns="0" rIns="0" bIns="0" anchor="t">
+            <a:spAutoFit/>
+          </a:bodyPr>
+          <a:lstStyle/>
+          <a:p>
+            <a:pPr algn="l">
+              <a:lnSpc>
+                <a:spcPct val="105000"/>
+              </a:lnSpc>
+            </a:pPr>
+            <a:r>
+              <a:rPr sz="1100" b="0" i="0">
+                <a:solidFill>
+                  <a:srgbClr val="1B2A41"/>
+                </a:solidFill>
+                <a:latin typeface="Calibri"/>
+              </a:rPr>
+              <a:t>You are a research analyst valuing Zomato for a long-term horizon. Write the best prompt in CRAFT format.</a:t>
+            </a:r>
+          </a:p>
+          <a:p>
+            <a:pPr algn="l">
+              <a:lnSpc>
+                <a:spcPct val="105000"/>
+              </a:lnSpc>
+              <a:spcBef>
+                <a:spcPts val="200"/>
+              </a:spcBef>
+            </a:pPr>
+            <a:r>
+              <a:rPr sz="900" b="1" i="0">
+                <a:solidFill>
+                  <a:srgbClr val="C9A227"/>
+                </a:solidFill>
+                <a:latin typeface="Calibri"/>
+              </a:rPr>
+              <a:t>TIP  </a:t>
+            </a:r>
+            <a:r>
+              <a:rPr sz="900" b="0" i="0">
+                <a:solidFill>
+                  <a:srgbClr val="5D6B7E"/>
+                </a:solidFill>
+                <a:latin typeface="Calibri"/>
+              </a:rPr>
+              <a:t>Context: Zomato, latest annual results, long-term view. Role: equity research analyst. Action: value it by DCF and peer multiples, list the risks. Format: one-page memo with a table. Tone: plain, board-ready.</a:t>
+            </a:r>
+          </a:p>
+        </p:txBody>
+      </p:sp>
+      <p:sp>
+        <p:nvSpPr>
+          <p:cNvPr id="17" name="Rectangle 16"/>
+          <p:cNvSpPr/>
+          <p:nvPr/>
+        </p:nvSpPr>
+        <p:spPr>
+          <a:xfrm>
+            <a:off x="548640" y="3986784"/>
+            <a:ext cx="11091672" cy="731520"/>
+          </a:xfrm>
+          <a:prstGeom prst="rect">
+            <a:avLst/>
+          </a:prstGeom>
+          <a:solidFill>
+            <a:srgbClr val="FFFFFF"/>
+          </a:solidFill>
+          <a:ln>
+            <a:noFill/>
+          </a:ln>
+          <a:effectLst/>
+        </p:spPr>
+        <p:style>
+          <a:lnRef idx="1">
+            <a:schemeClr val="accent1"/>
+          </a:lnRef>
+          <a:fillRef idx="3">
+            <a:schemeClr val="accent1"/>
+          </a:fillRef>
+          <a:effectRef idx="2">
+            <a:schemeClr val="accent1"/>
+          </a:effectRef>
+          <a:fontRef idx="minor">
+            <a:schemeClr val="lt1"/>
+          </a:fontRef>
+        </p:style>
+        <p:txBody>
+          <a:bodyPr rtlCol="0" anchor="ctr"/>
+          <a:lstStyle/>
+          <a:p>
+            <a:pPr algn="ctr"/>
+            <a:endParaRPr/>
+          </a:p>
+        </p:txBody>
+      </p:sp>
+      <p:sp>
+        <p:nvSpPr>
+          <p:cNvPr id="18" name="Rectangle 17"/>
+          <p:cNvSpPr/>
+          <p:nvPr/>
+        </p:nvSpPr>
+        <p:spPr>
+          <a:xfrm>
+            <a:off x="548640" y="3986784"/>
+            <a:ext cx="64008" cy="731520"/>
+          </a:xfrm>
+          <a:prstGeom prst="rect">
+            <a:avLst/>
+          </a:prstGeom>
+          <a:solidFill>
+            <a:srgbClr val="3A5C9E"/>
+          </a:solidFill>
+          <a:ln>
+            <a:noFill/>
+          </a:ln>
+          <a:effectLst/>
+        </p:spPr>
+        <p:style>
+          <a:lnRef idx="1">
+            <a:schemeClr val="accent1"/>
+          </a:lnRef>
+          <a:fillRef idx="3">
+            <a:schemeClr val="accent1"/>
+          </a:fillRef>
+          <a:effectRef idx="2">
+            <a:schemeClr val="accent1"/>
+          </a:effectRef>
+          <a:fontRef idx="minor">
+            <a:schemeClr val="lt1"/>
+          </a:fontRef>
+        </p:style>
+        <p:txBody>
+          <a:bodyPr rtlCol="0" anchor="ctr"/>
+          <a:lstStyle/>
+          <a:p>
+            <a:pPr algn="ctr"/>
+            <a:endParaRPr/>
+          </a:p>
+        </p:txBody>
+      </p:sp>
+      <p:sp>
+        <p:nvSpPr>
+          <p:cNvPr id="19" name="TextBox 18"/>
+          <p:cNvSpPr txBox="1"/>
+          <p:nvPr/>
+        </p:nvSpPr>
+        <p:spPr>
+          <a:xfrm>
+            <a:off x="822960" y="4069080"/>
+            <a:ext cx="640080" cy="365760"/>
+          </a:xfrm>
+          <a:prstGeom prst="rect">
+            <a:avLst/>
+          </a:prstGeom>
+          <a:noFill/>
+        </p:spPr>
+        <p:txBody>
+          <a:bodyPr wrap="square" lIns="0" tIns="0" rIns="0" bIns="0" anchor="t">
+            <a:spAutoFit/>
+          </a:bodyPr>
+          <a:lstStyle/>
+          <a:p>
+            <a:pPr algn="l">
+              <a:lnSpc>
+                <a:spcPct val="105000"/>
+              </a:lnSpc>
+            </a:pPr>
+            <a:r>
+              <a:rPr sz="1400" b="1" i="0">
+                <a:solidFill>
+                  <a:srgbClr val="3A5C9E"/>
+                </a:solidFill>
+                <a:latin typeface="Georgia"/>
+              </a:rPr>
+              <a:t>Q10</a:t>
+            </a:r>
+          </a:p>
+        </p:txBody>
+      </p:sp>
+      <p:sp>
+        <p:nvSpPr>
+          <p:cNvPr id="20" name="TextBox 19"/>
+          <p:cNvSpPr txBox="1"/>
+          <p:nvPr/>
+        </p:nvSpPr>
+        <p:spPr>
+          <a:xfrm>
+            <a:off x="1554480" y="4050792"/>
+            <a:ext cx="9875520" cy="603504"/>
+          </a:xfrm>
+          <a:prstGeom prst="rect">
+            <a:avLst/>
+          </a:prstGeom>
+          <a:noFill/>
+        </p:spPr>
+        <p:txBody>
+          <a:bodyPr wrap="square" lIns="0" tIns="0" rIns="0" bIns="0" anchor="t">
+            <a:spAutoFit/>
+          </a:bodyPr>
+          <a:lstStyle/>
+          <a:p>
+            <a:pPr algn="l">
+              <a:lnSpc>
+                <a:spcPct val="105000"/>
+              </a:lnSpc>
+            </a:pPr>
+            <a:r>
+              <a:rPr sz="1100" b="0" i="0">
+                <a:solidFill>
+                  <a:srgbClr val="1B2A41"/>
+                </a:solidFill>
+                <a:latin typeface="Calibri"/>
+              </a:rPr>
+              <a:t>How will you build a RAG pipeline for the 550-page Shiprocket DRHP, which would cost over a million tokens to paste? List the steps.</a:t>
+            </a:r>
+          </a:p>
+          <a:p>
+            <a:pPr algn="l">
+              <a:lnSpc>
+                <a:spcPct val="105000"/>
+              </a:lnSpc>
+              <a:spcBef>
+                <a:spcPts val="200"/>
+              </a:spcBef>
+            </a:pPr>
+            <a:r>
+              <a:rPr sz="900" b="1" i="0">
+                <a:solidFill>
+                  <a:srgbClr val="C9A227"/>
+                </a:solidFill>
+                <a:latin typeface="Calibri"/>
+              </a:rPr>
+              <a:t>TIP  </a:t>
+            </a:r>
+            <a:r>
+              <a:rPr sz="900" b="0" i="0">
+                <a:solidFill>
+                  <a:srgbClr val="5D6B7E"/>
+                </a:solidFill>
+                <a:latin typeface="Calibri"/>
+              </a:rPr>
+              <a:t>Load the PDF, chunk it by section, embed each chunk, store the vectors in a database, retrieve the top chunks for each question, and generate the answer with page citations.</a:t>
+            </a:r>
+          </a:p>
+        </p:txBody>
+      </p:sp>
+      <p:sp>
+        <p:nvSpPr>
+          <p:cNvPr id="29" name="TextBox 28"/>
+          <p:cNvSpPr txBox="1"/>
+          <p:nvPr/>
+        </p:nvSpPr>
+        <p:spPr>
+          <a:xfrm>
+            <a:off x="548640" y="6446520"/>
+            <a:ext cx="8229600" cy="274320"/>
+          </a:xfrm>
+          <a:prstGeom prst="rect">
+            <a:avLst/>
+          </a:prstGeom>
+          <a:noFill/>
+        </p:spPr>
+        <p:txBody>
+          <a:bodyPr wrap="square" lIns="0" tIns="0" rIns="0" bIns="0" anchor="t">
+            <a:spAutoFit/>
+          </a:bodyPr>
+          <a:lstStyle/>
+          <a:p>
+            <a:pPr algn="l">
+              <a:lnSpc>
+                <a:spcPct val="105000"/>
+              </a:lnSpc>
+            </a:pPr>
+            <a:r>
+              <a:rPr sz="850" b="0" i="0">
+                <a:solidFill>
+                  <a:srgbClr val="5D6B7E"/>
+                </a:solidFill>
+              </a:rPr>
+              <a:t>The tip is the shape of the answer, not the whole answer. Two or three sentences each in the exam.</a:t>
+            </a:r>
+          </a:p>
+        </p:txBody>
+      </p:sp>
+      <p:sp>
+        <p:nvSpPr>
+          <p:cNvPr id="30" name="TextBox 29"/>
           <p:cNvSpPr txBox="1"/>
           <p:nvPr/>
         </p:nvSpPr>

--- a/slides/Module-02-Prompt-Engineering-and-RAG.pptx
+++ b/slides/Module-02-Prompt-Engineering-and-RAG.pptx
@@ -6454,6 +6454,1014 @@
 </file>
 
 <file path=ppt/slides/slide12.xml><?xml version="1.0" encoding="utf-8"?>
+<p:sld xmlns:a="http://schemas.openxmlformats.org/drawingml/2006/main" xmlns:p="http://schemas.openxmlformats.org/presentationml/2006/main" xmlns:r="http://schemas.openxmlformats.org/officeDocument/2006/relationships">
+  <p:cSld>
+    <p:bg>
+      <p:bgPr>
+        <a:solidFill>
+          <a:srgbClr val="F7F8FA"/>
+        </a:solidFill>
+        <a:effectLst/>
+      </p:bgPr>
+    </p:bg>
+    <p:spTree>
+      <p:nvGrpSpPr>
+        <p:cNvPr id="1" name=""/>
+        <p:cNvGrpSpPr/>
+        <p:nvPr/>
+      </p:nvGrpSpPr>
+      <p:grpSpPr/>
+      <p:sp>
+        <p:nvSpPr>
+          <p:cNvPr id="2" name="Rectangle 1"/>
+          <p:cNvSpPr/>
+          <p:nvPr/>
+        </p:nvSpPr>
+        <p:spPr>
+          <a:xfrm>
+            <a:off x="548640" y="402336"/>
+            <a:ext cx="118872" cy="118872"/>
+          </a:xfrm>
+          <a:prstGeom prst="rect">
+            <a:avLst/>
+          </a:prstGeom>
+          <a:solidFill>
+            <a:srgbClr val="C9A227"/>
+          </a:solidFill>
+          <a:ln>
+            <a:noFill/>
+          </a:ln>
+          <a:effectLst/>
+        </p:spPr>
+        <p:style>
+          <a:lnRef idx="1">
+            <a:schemeClr val="accent1"/>
+          </a:lnRef>
+          <a:fillRef idx="3">
+            <a:schemeClr val="accent1"/>
+          </a:fillRef>
+          <a:effectRef idx="2">
+            <a:schemeClr val="accent1"/>
+          </a:effectRef>
+          <a:fontRef idx="minor">
+            <a:schemeClr val="lt1"/>
+          </a:fontRef>
+        </p:style>
+        <p:txBody>
+          <a:bodyPr rtlCol="0" anchor="ctr"/>
+          <a:lstStyle/>
+          <a:p>
+            <a:pPr algn="ctr"/>
+            <a:endParaRPr/>
+          </a:p>
+        </p:txBody>
+      </p:sp>
+      <p:sp>
+        <p:nvSpPr>
+          <p:cNvPr id="3" name="TextBox 2"/>
+          <p:cNvSpPr txBox="1"/>
+          <p:nvPr/>
+        </p:nvSpPr>
+        <p:spPr>
+          <a:xfrm>
+            <a:off x="786384" y="306324"/>
+            <a:ext cx="10817352" cy="274320"/>
+          </a:xfrm>
+          <a:prstGeom prst="rect">
+            <a:avLst/>
+          </a:prstGeom>
+          <a:noFill/>
+        </p:spPr>
+        <p:txBody>
+          <a:bodyPr wrap="square" lIns="0" tIns="0" rIns="0" bIns="0" anchor="t">
+            <a:spAutoFit/>
+          </a:bodyPr>
+          <a:lstStyle/>
+          <a:p>
+            <a:pPr algn="l">
+              <a:lnSpc>
+                <a:spcPct val="105000"/>
+              </a:lnSpc>
+            </a:pPr>
+            <a:r>
+              <a:rPr sz="1100" b="1" i="0">
+                <a:solidFill>
+                  <a:srgbClr val="C9A227"/>
+                </a:solidFill>
+              </a:rPr>
+              <a:t>PRACTICE QUESTIONS · PART A, CONTINUED</a:t>
+            </a:r>
+          </a:p>
+        </p:txBody>
+      </p:sp>
+      <p:sp>
+        <p:nvSpPr>
+          <p:cNvPr id="4" name="TextBox 3"/>
+          <p:cNvSpPr txBox="1"/>
+          <p:nvPr/>
+        </p:nvSpPr>
+        <p:spPr>
+          <a:xfrm>
+            <a:off x="548640" y="621792"/>
+            <a:ext cx="11091672" cy="731520"/>
+          </a:xfrm>
+          <a:prstGeom prst="rect">
+            <a:avLst/>
+          </a:prstGeom>
+          <a:noFill/>
+        </p:spPr>
+        <p:txBody>
+          <a:bodyPr wrap="square" lIns="0" tIns="0" rIns="0" bIns="0" anchor="t">
+            <a:spAutoFit/>
+          </a:bodyPr>
+          <a:lstStyle/>
+          <a:p>
+            <a:pPr algn="l">
+              <a:lnSpc>
+                <a:spcPct val="105000"/>
+              </a:lnSpc>
+            </a:pPr>
+            <a:r>
+              <a:rPr sz="2900" b="1" i="0">
+                <a:solidFill>
+                  <a:srgbClr val="0F2145"/>
+                </a:solidFill>
+                <a:latin typeface="Georgia"/>
+              </a:rPr>
+              <a:t>Four more on today's basics</a:t>
+            </a:r>
+          </a:p>
+        </p:txBody>
+      </p:sp>
+      <p:sp>
+        <p:nvSpPr>
+          <p:cNvPr id="5" name="Rectangle 4"/>
+          <p:cNvSpPr/>
+          <p:nvPr/>
+        </p:nvSpPr>
+        <p:spPr>
+          <a:xfrm>
+            <a:off x="548640" y="1572768"/>
+            <a:ext cx="11091672" cy="731520"/>
+          </a:xfrm>
+          <a:prstGeom prst="rect">
+            <a:avLst/>
+          </a:prstGeom>
+          <a:solidFill>
+            <a:srgbClr val="FFFFFF"/>
+          </a:solidFill>
+          <a:ln>
+            <a:noFill/>
+          </a:ln>
+          <a:effectLst/>
+        </p:spPr>
+        <p:style>
+          <a:lnRef idx="1">
+            <a:schemeClr val="accent1"/>
+          </a:lnRef>
+          <a:fillRef idx="3">
+            <a:schemeClr val="accent1"/>
+          </a:fillRef>
+          <a:effectRef idx="2">
+            <a:schemeClr val="accent1"/>
+          </a:effectRef>
+          <a:fontRef idx="minor">
+            <a:schemeClr val="lt1"/>
+          </a:fontRef>
+        </p:style>
+        <p:txBody>
+          <a:bodyPr rtlCol="0" anchor="ctr"/>
+          <a:lstStyle/>
+          <a:p>
+            <a:pPr algn="ctr"/>
+            <a:endParaRPr/>
+          </a:p>
+        </p:txBody>
+      </p:sp>
+      <p:sp>
+        <p:nvSpPr>
+          <p:cNvPr id="6" name="Rectangle 5"/>
+          <p:cNvSpPr/>
+          <p:nvPr/>
+        </p:nvSpPr>
+        <p:spPr>
+          <a:xfrm>
+            <a:off x="548640" y="1572768"/>
+            <a:ext cx="64008" cy="731520"/>
+          </a:xfrm>
+          <a:prstGeom prst="rect">
+            <a:avLst/>
+          </a:prstGeom>
+          <a:solidFill>
+            <a:srgbClr val="3A5C9E"/>
+          </a:solidFill>
+          <a:ln>
+            <a:noFill/>
+          </a:ln>
+          <a:effectLst/>
+        </p:spPr>
+        <p:style>
+          <a:lnRef idx="1">
+            <a:schemeClr val="accent1"/>
+          </a:lnRef>
+          <a:fillRef idx="3">
+            <a:schemeClr val="accent1"/>
+          </a:fillRef>
+          <a:effectRef idx="2">
+            <a:schemeClr val="accent1"/>
+          </a:effectRef>
+          <a:fontRef idx="minor">
+            <a:schemeClr val="lt1"/>
+          </a:fontRef>
+        </p:style>
+        <p:txBody>
+          <a:bodyPr rtlCol="0" anchor="ctr"/>
+          <a:lstStyle/>
+          <a:p>
+            <a:pPr algn="ctr"/>
+            <a:endParaRPr/>
+          </a:p>
+        </p:txBody>
+      </p:sp>
+      <p:sp>
+        <p:nvSpPr>
+          <p:cNvPr id="7" name="TextBox 6"/>
+          <p:cNvSpPr txBox="1"/>
+          <p:nvPr/>
+        </p:nvSpPr>
+        <p:spPr>
+          <a:xfrm>
+            <a:off x="822960" y="1655064"/>
+            <a:ext cx="640080" cy="365760"/>
+          </a:xfrm>
+          <a:prstGeom prst="rect">
+            <a:avLst/>
+          </a:prstGeom>
+          <a:noFill/>
+        </p:spPr>
+        <p:txBody>
+          <a:bodyPr wrap="square" lIns="0" tIns="0" rIns="0" bIns="0" anchor="t">
+            <a:spAutoFit/>
+          </a:bodyPr>
+          <a:lstStyle/>
+          <a:p>
+            <a:pPr algn="l">
+              <a:lnSpc>
+                <a:spcPct val="105000"/>
+              </a:lnSpc>
+            </a:pPr>
+            <a:r>
+              <a:rPr sz="1400" b="1" i="0">
+                <a:solidFill>
+                  <a:srgbClr val="3A5C9E"/>
+                </a:solidFill>
+                <a:latin typeface="Georgia"/>
+              </a:rPr>
+              <a:t>Q7</a:t>
+            </a:r>
+          </a:p>
+        </p:txBody>
+      </p:sp>
+      <p:sp>
+        <p:nvSpPr>
+          <p:cNvPr id="8" name="TextBox 7"/>
+          <p:cNvSpPr txBox="1"/>
+          <p:nvPr/>
+        </p:nvSpPr>
+        <p:spPr>
+          <a:xfrm>
+            <a:off x="1554480" y="1636776"/>
+            <a:ext cx="9875520" cy="603504"/>
+          </a:xfrm>
+          <a:prstGeom prst="rect">
+            <a:avLst/>
+          </a:prstGeom>
+          <a:noFill/>
+        </p:spPr>
+        <p:txBody>
+          <a:bodyPr wrap="square" lIns="0" tIns="0" rIns="0" bIns="0" anchor="t">
+            <a:spAutoFit/>
+          </a:bodyPr>
+          <a:lstStyle/>
+          <a:p>
+            <a:pPr algn="l">
+              <a:lnSpc>
+                <a:spcPct val="105000"/>
+              </a:lnSpc>
+            </a:pPr>
+            <a:r>
+              <a:rPr sz="1100" b="0" i="0">
+                <a:solidFill>
+                  <a:srgbClr val="1B2A41"/>
+                </a:solidFill>
+                <a:latin typeface="Calibri"/>
+              </a:rPr>
+              <a:t>What is the CRAFT prompt technique? Name the three things a role sets.</a:t>
+            </a:r>
+          </a:p>
+          <a:p>
+            <a:pPr algn="l">
+              <a:lnSpc>
+                <a:spcPct val="105000"/>
+              </a:lnSpc>
+              <a:spcBef>
+                <a:spcPts val="200"/>
+              </a:spcBef>
+            </a:pPr>
+            <a:r>
+              <a:rPr sz="900" b="1" i="0">
+                <a:solidFill>
+                  <a:srgbClr val="C9A227"/>
+                </a:solidFill>
+                <a:latin typeface="Calibri"/>
+              </a:rPr>
+              <a:t>TIP  </a:t>
+            </a:r>
+            <a:r>
+              <a:rPr sz="900" b="0" i="0">
+                <a:solidFill>
+                  <a:srgbClr val="5D6B7E"/>
+                </a:solidFill>
+                <a:latin typeface="Calibri"/>
+              </a:rPr>
+              <a:t>Context, Role, Action, Format, Tone. A role sets vocabulary, depth and audience, and it adds no new facts.</a:t>
+            </a:r>
+          </a:p>
+        </p:txBody>
+      </p:sp>
+      <p:sp>
+        <p:nvSpPr>
+          <p:cNvPr id="9" name="Rectangle 8"/>
+          <p:cNvSpPr/>
+          <p:nvPr/>
+        </p:nvSpPr>
+        <p:spPr>
+          <a:xfrm>
+            <a:off x="548640" y="2377440"/>
+            <a:ext cx="11091672" cy="731520"/>
+          </a:xfrm>
+          <a:prstGeom prst="rect">
+            <a:avLst/>
+          </a:prstGeom>
+          <a:solidFill>
+            <a:srgbClr val="FFFFFF"/>
+          </a:solidFill>
+          <a:ln>
+            <a:noFill/>
+          </a:ln>
+          <a:effectLst/>
+        </p:spPr>
+        <p:style>
+          <a:lnRef idx="1">
+            <a:schemeClr val="accent1"/>
+          </a:lnRef>
+          <a:fillRef idx="3">
+            <a:schemeClr val="accent1"/>
+          </a:fillRef>
+          <a:effectRef idx="2">
+            <a:schemeClr val="accent1"/>
+          </a:effectRef>
+          <a:fontRef idx="minor">
+            <a:schemeClr val="lt1"/>
+          </a:fontRef>
+        </p:style>
+        <p:txBody>
+          <a:bodyPr rtlCol="0" anchor="ctr"/>
+          <a:lstStyle/>
+          <a:p>
+            <a:pPr algn="ctr"/>
+            <a:endParaRPr/>
+          </a:p>
+        </p:txBody>
+      </p:sp>
+      <p:sp>
+        <p:nvSpPr>
+          <p:cNvPr id="10" name="Rectangle 9"/>
+          <p:cNvSpPr/>
+          <p:nvPr/>
+        </p:nvSpPr>
+        <p:spPr>
+          <a:xfrm>
+            <a:off x="548640" y="2377440"/>
+            <a:ext cx="64008" cy="731520"/>
+          </a:xfrm>
+          <a:prstGeom prst="rect">
+            <a:avLst/>
+          </a:prstGeom>
+          <a:solidFill>
+            <a:srgbClr val="3A5C9E"/>
+          </a:solidFill>
+          <a:ln>
+            <a:noFill/>
+          </a:ln>
+          <a:effectLst/>
+        </p:spPr>
+        <p:style>
+          <a:lnRef idx="1">
+            <a:schemeClr val="accent1"/>
+          </a:lnRef>
+          <a:fillRef idx="3">
+            <a:schemeClr val="accent1"/>
+          </a:fillRef>
+          <a:effectRef idx="2">
+            <a:schemeClr val="accent1"/>
+          </a:effectRef>
+          <a:fontRef idx="minor">
+            <a:schemeClr val="lt1"/>
+          </a:fontRef>
+        </p:style>
+        <p:txBody>
+          <a:bodyPr rtlCol="0" anchor="ctr"/>
+          <a:lstStyle/>
+          <a:p>
+            <a:pPr algn="ctr"/>
+            <a:endParaRPr/>
+          </a:p>
+        </p:txBody>
+      </p:sp>
+      <p:sp>
+        <p:nvSpPr>
+          <p:cNvPr id="11" name="TextBox 10"/>
+          <p:cNvSpPr txBox="1"/>
+          <p:nvPr/>
+        </p:nvSpPr>
+        <p:spPr>
+          <a:xfrm>
+            <a:off x="822960" y="2459736"/>
+            <a:ext cx="640080" cy="365760"/>
+          </a:xfrm>
+          <a:prstGeom prst="rect">
+            <a:avLst/>
+          </a:prstGeom>
+          <a:noFill/>
+        </p:spPr>
+        <p:txBody>
+          <a:bodyPr wrap="square" lIns="0" tIns="0" rIns="0" bIns="0" anchor="t">
+            <a:spAutoFit/>
+          </a:bodyPr>
+          <a:lstStyle/>
+          <a:p>
+            <a:pPr algn="l">
+              <a:lnSpc>
+                <a:spcPct val="105000"/>
+              </a:lnSpc>
+            </a:pPr>
+            <a:r>
+              <a:rPr sz="1400" b="1" i="0">
+                <a:solidFill>
+                  <a:srgbClr val="3A5C9E"/>
+                </a:solidFill>
+                <a:latin typeface="Georgia"/>
+              </a:rPr>
+              <a:t>Q8</a:t>
+            </a:r>
+          </a:p>
+        </p:txBody>
+      </p:sp>
+      <p:sp>
+        <p:nvSpPr>
+          <p:cNvPr id="12" name="TextBox 11"/>
+          <p:cNvSpPr txBox="1"/>
+          <p:nvPr/>
+        </p:nvSpPr>
+        <p:spPr>
+          <a:xfrm>
+            <a:off x="1554480" y="2441448"/>
+            <a:ext cx="9875520" cy="603504"/>
+          </a:xfrm>
+          <a:prstGeom prst="rect">
+            <a:avLst/>
+          </a:prstGeom>
+          <a:noFill/>
+        </p:spPr>
+        <p:txBody>
+          <a:bodyPr wrap="square" lIns="0" tIns="0" rIns="0" bIns="0" anchor="t">
+            <a:spAutoFit/>
+          </a:bodyPr>
+          <a:lstStyle/>
+          <a:p>
+            <a:pPr algn="l">
+              <a:lnSpc>
+                <a:spcPct val="105000"/>
+              </a:lnSpc>
+            </a:pPr>
+            <a:r>
+              <a:rPr sz="1100" b="0" i="0">
+                <a:solidFill>
+                  <a:srgbClr val="1B2A41"/>
+                </a:solidFill>
+                <a:latin typeface="Calibri"/>
+              </a:rPr>
+              <a:t>How will you reduce hallucination? (This was asked in an Accenture strategy interview.)</a:t>
+            </a:r>
+          </a:p>
+          <a:p>
+            <a:pPr algn="l">
+              <a:lnSpc>
+                <a:spcPct val="105000"/>
+              </a:lnSpc>
+              <a:spcBef>
+                <a:spcPts val="200"/>
+              </a:spcBef>
+            </a:pPr>
+            <a:r>
+              <a:rPr sz="900" b="1" i="0">
+                <a:solidFill>
+                  <a:srgbClr val="C9A227"/>
+                </a:solidFill>
+                <a:latin typeface="Calibri"/>
+              </a:rPr>
+              <a:t>TIP  </a:t>
+            </a:r>
+            <a:r>
+              <a:rPr sz="900" b="0" i="0">
+                <a:solidFill>
+                  <a:srgbClr val="5D6B7E"/>
+                </a:solidFill>
+                <a:latin typeface="Calibri"/>
+              </a:rPr>
+              <a:t>Give it the document (RAG), demand a page citation for every number, allow “I don't know”, fix the output format, and check every number with code.</a:t>
+            </a:r>
+          </a:p>
+        </p:txBody>
+      </p:sp>
+      <p:sp>
+        <p:nvSpPr>
+          <p:cNvPr id="13" name="Rectangle 12"/>
+          <p:cNvSpPr/>
+          <p:nvPr/>
+        </p:nvSpPr>
+        <p:spPr>
+          <a:xfrm>
+            <a:off x="548640" y="3182112"/>
+            <a:ext cx="11091672" cy="731520"/>
+          </a:xfrm>
+          <a:prstGeom prst="rect">
+            <a:avLst/>
+          </a:prstGeom>
+          <a:solidFill>
+            <a:srgbClr val="FFFFFF"/>
+          </a:solidFill>
+          <a:ln>
+            <a:noFill/>
+          </a:ln>
+          <a:effectLst/>
+        </p:spPr>
+        <p:style>
+          <a:lnRef idx="1">
+            <a:schemeClr val="accent1"/>
+          </a:lnRef>
+          <a:fillRef idx="3">
+            <a:schemeClr val="accent1"/>
+          </a:fillRef>
+          <a:effectRef idx="2">
+            <a:schemeClr val="accent1"/>
+          </a:effectRef>
+          <a:fontRef idx="minor">
+            <a:schemeClr val="lt1"/>
+          </a:fontRef>
+        </p:style>
+        <p:txBody>
+          <a:bodyPr rtlCol="0" anchor="ctr"/>
+          <a:lstStyle/>
+          <a:p>
+            <a:pPr algn="ctr"/>
+            <a:endParaRPr/>
+          </a:p>
+        </p:txBody>
+      </p:sp>
+      <p:sp>
+        <p:nvSpPr>
+          <p:cNvPr id="14" name="Rectangle 13"/>
+          <p:cNvSpPr/>
+          <p:nvPr/>
+        </p:nvSpPr>
+        <p:spPr>
+          <a:xfrm>
+            <a:off x="548640" y="3182112"/>
+            <a:ext cx="64008" cy="731520"/>
+          </a:xfrm>
+          <a:prstGeom prst="rect">
+            <a:avLst/>
+          </a:prstGeom>
+          <a:solidFill>
+            <a:srgbClr val="3A5C9E"/>
+          </a:solidFill>
+          <a:ln>
+            <a:noFill/>
+          </a:ln>
+          <a:effectLst/>
+        </p:spPr>
+        <p:style>
+          <a:lnRef idx="1">
+            <a:schemeClr val="accent1"/>
+          </a:lnRef>
+          <a:fillRef idx="3">
+            <a:schemeClr val="accent1"/>
+          </a:fillRef>
+          <a:effectRef idx="2">
+            <a:schemeClr val="accent1"/>
+          </a:effectRef>
+          <a:fontRef idx="minor">
+            <a:schemeClr val="lt1"/>
+          </a:fontRef>
+        </p:style>
+        <p:txBody>
+          <a:bodyPr rtlCol="0" anchor="ctr"/>
+          <a:lstStyle/>
+          <a:p>
+            <a:pPr algn="ctr"/>
+            <a:endParaRPr/>
+          </a:p>
+        </p:txBody>
+      </p:sp>
+      <p:sp>
+        <p:nvSpPr>
+          <p:cNvPr id="15" name="TextBox 14"/>
+          <p:cNvSpPr txBox="1"/>
+          <p:nvPr/>
+        </p:nvSpPr>
+        <p:spPr>
+          <a:xfrm>
+            <a:off x="822960" y="3264408"/>
+            <a:ext cx="640080" cy="365760"/>
+          </a:xfrm>
+          <a:prstGeom prst="rect">
+            <a:avLst/>
+          </a:prstGeom>
+          <a:noFill/>
+        </p:spPr>
+        <p:txBody>
+          <a:bodyPr wrap="square" lIns="0" tIns="0" rIns="0" bIns="0" anchor="t">
+            <a:spAutoFit/>
+          </a:bodyPr>
+          <a:lstStyle/>
+          <a:p>
+            <a:pPr algn="l">
+              <a:lnSpc>
+                <a:spcPct val="105000"/>
+              </a:lnSpc>
+            </a:pPr>
+            <a:r>
+              <a:rPr sz="1400" b="1" i="0">
+                <a:solidFill>
+                  <a:srgbClr val="3A5C9E"/>
+                </a:solidFill>
+                <a:latin typeface="Georgia"/>
+              </a:rPr>
+              <a:t>Q9</a:t>
+            </a:r>
+          </a:p>
+        </p:txBody>
+      </p:sp>
+      <p:sp>
+        <p:nvSpPr>
+          <p:cNvPr id="16" name="TextBox 15"/>
+          <p:cNvSpPr txBox="1"/>
+          <p:nvPr/>
+        </p:nvSpPr>
+        <p:spPr>
+          <a:xfrm>
+            <a:off x="1554480" y="3246120"/>
+            <a:ext cx="9875520" cy="603504"/>
+          </a:xfrm>
+          <a:prstGeom prst="rect">
+            <a:avLst/>
+          </a:prstGeom>
+          <a:noFill/>
+        </p:spPr>
+        <p:txBody>
+          <a:bodyPr wrap="square" lIns="0" tIns="0" rIns="0" bIns="0" anchor="t">
+            <a:spAutoFit/>
+          </a:bodyPr>
+          <a:lstStyle/>
+          <a:p>
+            <a:pPr algn="l">
+              <a:lnSpc>
+                <a:spcPct val="105000"/>
+              </a:lnSpc>
+            </a:pPr>
+            <a:r>
+              <a:rPr sz="1100" b="0" i="0">
+                <a:solidFill>
+                  <a:srgbClr val="1B2A41"/>
+                </a:solidFill>
+                <a:latin typeface="Calibri"/>
+              </a:rPr>
+              <a:t>You are a research analyst valuing Zomato for a long-term horizon. Write the best prompt in CRAFT format.</a:t>
+            </a:r>
+          </a:p>
+          <a:p>
+            <a:pPr algn="l">
+              <a:lnSpc>
+                <a:spcPct val="105000"/>
+              </a:lnSpc>
+              <a:spcBef>
+                <a:spcPts val="200"/>
+              </a:spcBef>
+            </a:pPr>
+            <a:r>
+              <a:rPr sz="900" b="1" i="0">
+                <a:solidFill>
+                  <a:srgbClr val="C9A227"/>
+                </a:solidFill>
+                <a:latin typeface="Calibri"/>
+              </a:rPr>
+              <a:t>TIP  </a:t>
+            </a:r>
+            <a:r>
+              <a:rPr sz="900" b="0" i="0">
+                <a:solidFill>
+                  <a:srgbClr val="5D6B7E"/>
+                </a:solidFill>
+                <a:latin typeface="Calibri"/>
+              </a:rPr>
+              <a:t>Context: Zomato, latest annual results, long-term view. Role: equity research analyst. Action: value it by DCF and peer multiples, list the risks. Format: one-page memo with a table. Tone: plain, board-ready.</a:t>
+            </a:r>
+          </a:p>
+        </p:txBody>
+      </p:sp>
+      <p:sp>
+        <p:nvSpPr>
+          <p:cNvPr id="17" name="Rectangle 16"/>
+          <p:cNvSpPr/>
+          <p:nvPr/>
+        </p:nvSpPr>
+        <p:spPr>
+          <a:xfrm>
+            <a:off x="548640" y="3986784"/>
+            <a:ext cx="11091672" cy="731520"/>
+          </a:xfrm>
+          <a:prstGeom prst="rect">
+            <a:avLst/>
+          </a:prstGeom>
+          <a:solidFill>
+            <a:srgbClr val="FFFFFF"/>
+          </a:solidFill>
+          <a:ln>
+            <a:noFill/>
+          </a:ln>
+          <a:effectLst/>
+        </p:spPr>
+        <p:style>
+          <a:lnRef idx="1">
+            <a:schemeClr val="accent1"/>
+          </a:lnRef>
+          <a:fillRef idx="3">
+            <a:schemeClr val="accent1"/>
+          </a:fillRef>
+          <a:effectRef idx="2">
+            <a:schemeClr val="accent1"/>
+          </a:effectRef>
+          <a:fontRef idx="minor">
+            <a:schemeClr val="lt1"/>
+          </a:fontRef>
+        </p:style>
+        <p:txBody>
+          <a:bodyPr rtlCol="0" anchor="ctr"/>
+          <a:lstStyle/>
+          <a:p>
+            <a:pPr algn="ctr"/>
+            <a:endParaRPr/>
+          </a:p>
+        </p:txBody>
+      </p:sp>
+      <p:sp>
+        <p:nvSpPr>
+          <p:cNvPr id="18" name="Rectangle 17"/>
+          <p:cNvSpPr/>
+          <p:nvPr/>
+        </p:nvSpPr>
+        <p:spPr>
+          <a:xfrm>
+            <a:off x="548640" y="3986784"/>
+            <a:ext cx="64008" cy="731520"/>
+          </a:xfrm>
+          <a:prstGeom prst="rect">
+            <a:avLst/>
+          </a:prstGeom>
+          <a:solidFill>
+            <a:srgbClr val="3A5C9E"/>
+          </a:solidFill>
+          <a:ln>
+            <a:noFill/>
+          </a:ln>
+          <a:effectLst/>
+        </p:spPr>
+        <p:style>
+          <a:lnRef idx="1">
+            <a:schemeClr val="accent1"/>
+          </a:lnRef>
+          <a:fillRef idx="3">
+            <a:schemeClr val="accent1"/>
+          </a:fillRef>
+          <a:effectRef idx="2">
+            <a:schemeClr val="accent1"/>
+          </a:effectRef>
+          <a:fontRef idx="minor">
+            <a:schemeClr val="lt1"/>
+          </a:fontRef>
+        </p:style>
+        <p:txBody>
+          <a:bodyPr rtlCol="0" anchor="ctr"/>
+          <a:lstStyle/>
+          <a:p>
+            <a:pPr algn="ctr"/>
+            <a:endParaRPr/>
+          </a:p>
+        </p:txBody>
+      </p:sp>
+      <p:sp>
+        <p:nvSpPr>
+          <p:cNvPr id="19" name="TextBox 18"/>
+          <p:cNvSpPr txBox="1"/>
+          <p:nvPr/>
+        </p:nvSpPr>
+        <p:spPr>
+          <a:xfrm>
+            <a:off x="822960" y="4069080"/>
+            <a:ext cx="640080" cy="365760"/>
+          </a:xfrm>
+          <a:prstGeom prst="rect">
+            <a:avLst/>
+          </a:prstGeom>
+          <a:noFill/>
+        </p:spPr>
+        <p:txBody>
+          <a:bodyPr wrap="square" lIns="0" tIns="0" rIns="0" bIns="0" anchor="t">
+            <a:spAutoFit/>
+          </a:bodyPr>
+          <a:lstStyle/>
+          <a:p>
+            <a:pPr algn="l">
+              <a:lnSpc>
+                <a:spcPct val="105000"/>
+              </a:lnSpc>
+            </a:pPr>
+            <a:r>
+              <a:rPr sz="1400" b="1" i="0">
+                <a:solidFill>
+                  <a:srgbClr val="3A5C9E"/>
+                </a:solidFill>
+                <a:latin typeface="Georgia"/>
+              </a:rPr>
+              <a:t>Q10</a:t>
+            </a:r>
+          </a:p>
+        </p:txBody>
+      </p:sp>
+      <p:sp>
+        <p:nvSpPr>
+          <p:cNvPr id="20" name="TextBox 19"/>
+          <p:cNvSpPr txBox="1"/>
+          <p:nvPr/>
+        </p:nvSpPr>
+        <p:spPr>
+          <a:xfrm>
+            <a:off x="1554480" y="4050792"/>
+            <a:ext cx="9875520" cy="603504"/>
+          </a:xfrm>
+          <a:prstGeom prst="rect">
+            <a:avLst/>
+          </a:prstGeom>
+          <a:noFill/>
+        </p:spPr>
+        <p:txBody>
+          <a:bodyPr wrap="square" lIns="0" tIns="0" rIns="0" bIns="0" anchor="t">
+            <a:spAutoFit/>
+          </a:bodyPr>
+          <a:lstStyle/>
+          <a:p>
+            <a:pPr algn="l">
+              <a:lnSpc>
+                <a:spcPct val="105000"/>
+              </a:lnSpc>
+            </a:pPr>
+            <a:r>
+              <a:rPr sz="1100" b="0" i="0">
+                <a:solidFill>
+                  <a:srgbClr val="1B2A41"/>
+                </a:solidFill>
+                <a:latin typeface="Calibri"/>
+              </a:rPr>
+              <a:t>How will you build a RAG pipeline for the 550-page Shiprocket DRHP, which would cost over a million tokens to paste? List the steps.</a:t>
+            </a:r>
+          </a:p>
+          <a:p>
+            <a:pPr algn="l">
+              <a:lnSpc>
+                <a:spcPct val="105000"/>
+              </a:lnSpc>
+              <a:spcBef>
+                <a:spcPts val="200"/>
+              </a:spcBef>
+            </a:pPr>
+            <a:r>
+              <a:rPr sz="900" b="1" i="0">
+                <a:solidFill>
+                  <a:srgbClr val="C9A227"/>
+                </a:solidFill>
+                <a:latin typeface="Calibri"/>
+              </a:rPr>
+              <a:t>TIP  </a:t>
+            </a:r>
+            <a:r>
+              <a:rPr sz="900" b="0" i="0">
+                <a:solidFill>
+                  <a:srgbClr val="5D6B7E"/>
+                </a:solidFill>
+                <a:latin typeface="Calibri"/>
+              </a:rPr>
+              <a:t>Load the PDF, chunk it by section, embed each chunk, store the vectors in a database, retrieve the top chunks for each question, and generate the answer with page citations.</a:t>
+            </a:r>
+          </a:p>
+        </p:txBody>
+      </p:sp>
+      <p:sp>
+        <p:nvSpPr>
+          <p:cNvPr id="29" name="TextBox 28"/>
+          <p:cNvSpPr txBox="1"/>
+          <p:nvPr/>
+        </p:nvSpPr>
+        <p:spPr>
+          <a:xfrm>
+            <a:off x="548640" y="6446520"/>
+            <a:ext cx="8229600" cy="274320"/>
+          </a:xfrm>
+          <a:prstGeom prst="rect">
+            <a:avLst/>
+          </a:prstGeom>
+          <a:noFill/>
+        </p:spPr>
+        <p:txBody>
+          <a:bodyPr wrap="square" lIns="0" tIns="0" rIns="0" bIns="0" anchor="t">
+            <a:spAutoFit/>
+          </a:bodyPr>
+          <a:lstStyle/>
+          <a:p>
+            <a:pPr algn="l">
+              <a:lnSpc>
+                <a:spcPct val="105000"/>
+              </a:lnSpc>
+            </a:pPr>
+            <a:r>
+              <a:rPr sz="850" b="0" i="0">
+                <a:solidFill>
+                  <a:srgbClr val="5D6B7E"/>
+                </a:solidFill>
+              </a:rPr>
+              <a:t>The tip is the shape of the answer, not the whole answer. Two or three sentences each in the exam.</a:t>
+            </a:r>
+          </a:p>
+        </p:txBody>
+      </p:sp>
+      <p:sp>
+        <p:nvSpPr>
+          <p:cNvPr id="30" name="TextBox 29"/>
+          <p:cNvSpPr txBox="1"/>
+          <p:nvPr/>
+        </p:nvSpPr>
+        <p:spPr>
+          <a:xfrm>
+            <a:off x="9262872" y="6473952"/>
+            <a:ext cx="2377440" cy="228600"/>
+          </a:xfrm>
+          <a:prstGeom prst="rect">
+            <a:avLst/>
+          </a:prstGeom>
+          <a:noFill/>
+        </p:spPr>
+        <p:txBody>
+          <a:bodyPr wrap="square" lIns="0" tIns="0" rIns="0" bIns="0" anchor="t">
+            <a:spAutoFit/>
+          </a:bodyPr>
+          <a:lstStyle/>
+          <a:p>
+            <a:pPr algn="r">
+              <a:lnSpc>
+                <a:spcPct val="105000"/>
+              </a:lnSpc>
+            </a:pPr>
+            <a:r>
+              <a:rPr sz="800" b="0" i="0">
+                <a:solidFill>
+                  <a:srgbClr val="5D6B7E"/>
+                </a:solidFill>
+              </a:rPr>
+              <a:t>MODULE 2  ·  12</a:t>
+            </a:r>
+          </a:p>
+        </p:txBody>
+      </p:sp>
+    </p:spTree>
+  </p:cSld>
+  <p:clrMapOvr>
+    <a:masterClrMapping/>
+  </p:clrMapOvr>
+</p:sld>
+</file>
+
+<file path=ppt/slides/slide13.xml><?xml version="1.0" encoding="utf-8"?>
 <p:sld xmlns:a="http://schemas.openxmlformats.org/drawingml/2006/main" xmlns:r="http://schemas.openxmlformats.org/officeDocument/2006/relationships" xmlns:p="http://schemas.openxmlformats.org/presentationml/2006/main">
   <p:cSld>
     <p:bg>
@@ -7351,1014 +8359,6 @@
                 </a:solidFill>
               </a:rPr>
               <a:t>MODULE 2  ·  13</a:t>
-            </a:r>
-          </a:p>
-        </p:txBody>
-      </p:sp>
-    </p:spTree>
-  </p:cSld>
-  <p:clrMapOvr>
-    <a:masterClrMapping/>
-  </p:clrMapOvr>
-</p:sld>
-</file>
-
-<file path=ppt/slides/slide13.xml><?xml version="1.0" encoding="utf-8"?>
-<p:sld xmlns:a="http://schemas.openxmlformats.org/drawingml/2006/main" xmlns:p="http://schemas.openxmlformats.org/presentationml/2006/main" xmlns:r="http://schemas.openxmlformats.org/officeDocument/2006/relationships">
-  <p:cSld>
-    <p:bg>
-      <p:bgPr>
-        <a:solidFill>
-          <a:srgbClr val="F7F8FA"/>
-        </a:solidFill>
-        <a:effectLst/>
-      </p:bgPr>
-    </p:bg>
-    <p:spTree>
-      <p:nvGrpSpPr>
-        <p:cNvPr id="1" name=""/>
-        <p:cNvGrpSpPr/>
-        <p:nvPr/>
-      </p:nvGrpSpPr>
-      <p:grpSpPr/>
-      <p:sp>
-        <p:nvSpPr>
-          <p:cNvPr id="2" name="Rectangle 1"/>
-          <p:cNvSpPr/>
-          <p:nvPr/>
-        </p:nvSpPr>
-        <p:spPr>
-          <a:xfrm>
-            <a:off x="548640" y="402336"/>
-            <a:ext cx="118872" cy="118872"/>
-          </a:xfrm>
-          <a:prstGeom prst="rect">
-            <a:avLst/>
-          </a:prstGeom>
-          <a:solidFill>
-            <a:srgbClr val="C9A227"/>
-          </a:solidFill>
-          <a:ln>
-            <a:noFill/>
-          </a:ln>
-          <a:effectLst/>
-        </p:spPr>
-        <p:style>
-          <a:lnRef idx="1">
-            <a:schemeClr val="accent1"/>
-          </a:lnRef>
-          <a:fillRef idx="3">
-            <a:schemeClr val="accent1"/>
-          </a:fillRef>
-          <a:effectRef idx="2">
-            <a:schemeClr val="accent1"/>
-          </a:effectRef>
-          <a:fontRef idx="minor">
-            <a:schemeClr val="lt1"/>
-          </a:fontRef>
-        </p:style>
-        <p:txBody>
-          <a:bodyPr rtlCol="0" anchor="ctr"/>
-          <a:lstStyle/>
-          <a:p>
-            <a:pPr algn="ctr"/>
-            <a:endParaRPr/>
-          </a:p>
-        </p:txBody>
-      </p:sp>
-      <p:sp>
-        <p:nvSpPr>
-          <p:cNvPr id="3" name="TextBox 2"/>
-          <p:cNvSpPr txBox="1"/>
-          <p:nvPr/>
-        </p:nvSpPr>
-        <p:spPr>
-          <a:xfrm>
-            <a:off x="786384" y="306324"/>
-            <a:ext cx="10817352" cy="274320"/>
-          </a:xfrm>
-          <a:prstGeom prst="rect">
-            <a:avLst/>
-          </a:prstGeom>
-          <a:noFill/>
-        </p:spPr>
-        <p:txBody>
-          <a:bodyPr wrap="square" lIns="0" tIns="0" rIns="0" bIns="0" anchor="t">
-            <a:spAutoFit/>
-          </a:bodyPr>
-          <a:lstStyle/>
-          <a:p>
-            <a:pPr algn="l">
-              <a:lnSpc>
-                <a:spcPct val="105000"/>
-              </a:lnSpc>
-            </a:pPr>
-            <a:r>
-              <a:rPr sz="1100" b="1" i="0">
-                <a:solidFill>
-                  <a:srgbClr val="C9A227"/>
-                </a:solidFill>
-              </a:rPr>
-              <a:t>PRACTICE QUESTIONS · PART A, CONTINUED</a:t>
-            </a:r>
-          </a:p>
-        </p:txBody>
-      </p:sp>
-      <p:sp>
-        <p:nvSpPr>
-          <p:cNvPr id="4" name="TextBox 3"/>
-          <p:cNvSpPr txBox="1"/>
-          <p:nvPr/>
-        </p:nvSpPr>
-        <p:spPr>
-          <a:xfrm>
-            <a:off x="548640" y="621792"/>
-            <a:ext cx="11091672" cy="731520"/>
-          </a:xfrm>
-          <a:prstGeom prst="rect">
-            <a:avLst/>
-          </a:prstGeom>
-          <a:noFill/>
-        </p:spPr>
-        <p:txBody>
-          <a:bodyPr wrap="square" lIns="0" tIns="0" rIns="0" bIns="0" anchor="t">
-            <a:spAutoFit/>
-          </a:bodyPr>
-          <a:lstStyle/>
-          <a:p>
-            <a:pPr algn="l">
-              <a:lnSpc>
-                <a:spcPct val="105000"/>
-              </a:lnSpc>
-            </a:pPr>
-            <a:r>
-              <a:rPr sz="2900" b="1" i="0">
-                <a:solidFill>
-                  <a:srgbClr val="0F2145"/>
-                </a:solidFill>
-                <a:latin typeface="Georgia"/>
-              </a:rPr>
-              <a:t>Four more from the mid-term paper</a:t>
-            </a:r>
-          </a:p>
-        </p:txBody>
-      </p:sp>
-      <p:sp>
-        <p:nvSpPr>
-          <p:cNvPr id="5" name="Rectangle 4"/>
-          <p:cNvSpPr/>
-          <p:nvPr/>
-        </p:nvSpPr>
-        <p:spPr>
-          <a:xfrm>
-            <a:off x="548640" y="1572768"/>
-            <a:ext cx="11091672" cy="731520"/>
-          </a:xfrm>
-          <a:prstGeom prst="rect">
-            <a:avLst/>
-          </a:prstGeom>
-          <a:solidFill>
-            <a:srgbClr val="FFFFFF"/>
-          </a:solidFill>
-          <a:ln>
-            <a:noFill/>
-          </a:ln>
-          <a:effectLst/>
-        </p:spPr>
-        <p:style>
-          <a:lnRef idx="1">
-            <a:schemeClr val="accent1"/>
-          </a:lnRef>
-          <a:fillRef idx="3">
-            <a:schemeClr val="accent1"/>
-          </a:fillRef>
-          <a:effectRef idx="2">
-            <a:schemeClr val="accent1"/>
-          </a:effectRef>
-          <a:fontRef idx="minor">
-            <a:schemeClr val="lt1"/>
-          </a:fontRef>
-        </p:style>
-        <p:txBody>
-          <a:bodyPr rtlCol="0" anchor="ctr"/>
-          <a:lstStyle/>
-          <a:p>
-            <a:pPr algn="ctr"/>
-            <a:endParaRPr/>
-          </a:p>
-        </p:txBody>
-      </p:sp>
-      <p:sp>
-        <p:nvSpPr>
-          <p:cNvPr id="6" name="Rectangle 5"/>
-          <p:cNvSpPr/>
-          <p:nvPr/>
-        </p:nvSpPr>
-        <p:spPr>
-          <a:xfrm>
-            <a:off x="548640" y="1572768"/>
-            <a:ext cx="64008" cy="731520"/>
-          </a:xfrm>
-          <a:prstGeom prst="rect">
-            <a:avLst/>
-          </a:prstGeom>
-          <a:solidFill>
-            <a:srgbClr val="3A5C9E"/>
-          </a:solidFill>
-          <a:ln>
-            <a:noFill/>
-          </a:ln>
-          <a:effectLst/>
-        </p:spPr>
-        <p:style>
-          <a:lnRef idx="1">
-            <a:schemeClr val="accent1"/>
-          </a:lnRef>
-          <a:fillRef idx="3">
-            <a:schemeClr val="accent1"/>
-          </a:fillRef>
-          <a:effectRef idx="2">
-            <a:schemeClr val="accent1"/>
-          </a:effectRef>
-          <a:fontRef idx="minor">
-            <a:schemeClr val="lt1"/>
-          </a:fontRef>
-        </p:style>
-        <p:txBody>
-          <a:bodyPr rtlCol="0" anchor="ctr"/>
-          <a:lstStyle/>
-          <a:p>
-            <a:pPr algn="ctr"/>
-            <a:endParaRPr/>
-          </a:p>
-        </p:txBody>
-      </p:sp>
-      <p:sp>
-        <p:nvSpPr>
-          <p:cNvPr id="7" name="TextBox 6"/>
-          <p:cNvSpPr txBox="1"/>
-          <p:nvPr/>
-        </p:nvSpPr>
-        <p:spPr>
-          <a:xfrm>
-            <a:off x="822960" y="1655064"/>
-            <a:ext cx="640080" cy="365760"/>
-          </a:xfrm>
-          <a:prstGeom prst="rect">
-            <a:avLst/>
-          </a:prstGeom>
-          <a:noFill/>
-        </p:spPr>
-        <p:txBody>
-          <a:bodyPr wrap="square" lIns="0" tIns="0" rIns="0" bIns="0" anchor="t">
-            <a:spAutoFit/>
-          </a:bodyPr>
-          <a:lstStyle/>
-          <a:p>
-            <a:pPr algn="l">
-              <a:lnSpc>
-                <a:spcPct val="105000"/>
-              </a:lnSpc>
-            </a:pPr>
-            <a:r>
-              <a:rPr sz="1400" b="1" i="0">
-                <a:solidFill>
-                  <a:srgbClr val="3A5C9E"/>
-                </a:solidFill>
-                <a:latin typeface="Georgia"/>
-              </a:rPr>
-              <a:t>Q7</a:t>
-            </a:r>
-          </a:p>
-        </p:txBody>
-      </p:sp>
-      <p:sp>
-        <p:nvSpPr>
-          <p:cNvPr id="8" name="TextBox 7"/>
-          <p:cNvSpPr txBox="1"/>
-          <p:nvPr/>
-        </p:nvSpPr>
-        <p:spPr>
-          <a:xfrm>
-            <a:off x="1554480" y="1636776"/>
-            <a:ext cx="9875520" cy="603504"/>
-          </a:xfrm>
-          <a:prstGeom prst="rect">
-            <a:avLst/>
-          </a:prstGeom>
-          <a:noFill/>
-        </p:spPr>
-        <p:txBody>
-          <a:bodyPr wrap="square" lIns="0" tIns="0" rIns="0" bIns="0" anchor="t">
-            <a:spAutoFit/>
-          </a:bodyPr>
-          <a:lstStyle/>
-          <a:p>
-            <a:pPr algn="l">
-              <a:lnSpc>
-                <a:spcPct val="105000"/>
-              </a:lnSpc>
-            </a:pPr>
-            <a:r>
-              <a:rPr sz="1100" b="0" i="0">
-                <a:solidFill>
-                  <a:srgbClr val="1B2A41"/>
-                </a:solidFill>
-                <a:latin typeface="Calibri"/>
-              </a:rPr>
-              <a:t>What is the CRAFT prompt technique? Name the three things a role sets.</a:t>
-            </a:r>
-          </a:p>
-          <a:p>
-            <a:pPr algn="l">
-              <a:lnSpc>
-                <a:spcPct val="105000"/>
-              </a:lnSpc>
-              <a:spcBef>
-                <a:spcPts val="200"/>
-              </a:spcBef>
-            </a:pPr>
-            <a:r>
-              <a:rPr sz="900" b="1" i="0">
-                <a:solidFill>
-                  <a:srgbClr val="C9A227"/>
-                </a:solidFill>
-                <a:latin typeface="Calibri"/>
-              </a:rPr>
-              <a:t>TIP  </a:t>
-            </a:r>
-            <a:r>
-              <a:rPr sz="900" b="0" i="0">
-                <a:solidFill>
-                  <a:srgbClr val="5D6B7E"/>
-                </a:solidFill>
-                <a:latin typeface="Calibri"/>
-              </a:rPr>
-              <a:t>Context, Role, Action, Format, Tone. A role sets vocabulary, depth and audience, and it adds no new facts.</a:t>
-            </a:r>
-          </a:p>
-        </p:txBody>
-      </p:sp>
-      <p:sp>
-        <p:nvSpPr>
-          <p:cNvPr id="9" name="Rectangle 8"/>
-          <p:cNvSpPr/>
-          <p:nvPr/>
-        </p:nvSpPr>
-        <p:spPr>
-          <a:xfrm>
-            <a:off x="548640" y="2377440"/>
-            <a:ext cx="11091672" cy="731520"/>
-          </a:xfrm>
-          <a:prstGeom prst="rect">
-            <a:avLst/>
-          </a:prstGeom>
-          <a:solidFill>
-            <a:srgbClr val="FFFFFF"/>
-          </a:solidFill>
-          <a:ln>
-            <a:noFill/>
-          </a:ln>
-          <a:effectLst/>
-        </p:spPr>
-        <p:style>
-          <a:lnRef idx="1">
-            <a:schemeClr val="accent1"/>
-          </a:lnRef>
-          <a:fillRef idx="3">
-            <a:schemeClr val="accent1"/>
-          </a:fillRef>
-          <a:effectRef idx="2">
-            <a:schemeClr val="accent1"/>
-          </a:effectRef>
-          <a:fontRef idx="minor">
-            <a:schemeClr val="lt1"/>
-          </a:fontRef>
-        </p:style>
-        <p:txBody>
-          <a:bodyPr rtlCol="0" anchor="ctr"/>
-          <a:lstStyle/>
-          <a:p>
-            <a:pPr algn="ctr"/>
-            <a:endParaRPr/>
-          </a:p>
-        </p:txBody>
-      </p:sp>
-      <p:sp>
-        <p:nvSpPr>
-          <p:cNvPr id="10" name="Rectangle 9"/>
-          <p:cNvSpPr/>
-          <p:nvPr/>
-        </p:nvSpPr>
-        <p:spPr>
-          <a:xfrm>
-            <a:off x="548640" y="2377440"/>
-            <a:ext cx="64008" cy="731520"/>
-          </a:xfrm>
-          <a:prstGeom prst="rect">
-            <a:avLst/>
-          </a:prstGeom>
-          <a:solidFill>
-            <a:srgbClr val="3A5C9E"/>
-          </a:solidFill>
-          <a:ln>
-            <a:noFill/>
-          </a:ln>
-          <a:effectLst/>
-        </p:spPr>
-        <p:style>
-          <a:lnRef idx="1">
-            <a:schemeClr val="accent1"/>
-          </a:lnRef>
-          <a:fillRef idx="3">
-            <a:schemeClr val="accent1"/>
-          </a:fillRef>
-          <a:effectRef idx="2">
-            <a:schemeClr val="accent1"/>
-          </a:effectRef>
-          <a:fontRef idx="minor">
-            <a:schemeClr val="lt1"/>
-          </a:fontRef>
-        </p:style>
-        <p:txBody>
-          <a:bodyPr rtlCol="0" anchor="ctr"/>
-          <a:lstStyle/>
-          <a:p>
-            <a:pPr algn="ctr"/>
-            <a:endParaRPr/>
-          </a:p>
-        </p:txBody>
-      </p:sp>
-      <p:sp>
-        <p:nvSpPr>
-          <p:cNvPr id="11" name="TextBox 10"/>
-          <p:cNvSpPr txBox="1"/>
-          <p:nvPr/>
-        </p:nvSpPr>
-        <p:spPr>
-          <a:xfrm>
-            <a:off x="822960" y="2459736"/>
-            <a:ext cx="640080" cy="365760"/>
-          </a:xfrm>
-          <a:prstGeom prst="rect">
-            <a:avLst/>
-          </a:prstGeom>
-          <a:noFill/>
-        </p:spPr>
-        <p:txBody>
-          <a:bodyPr wrap="square" lIns="0" tIns="0" rIns="0" bIns="0" anchor="t">
-            <a:spAutoFit/>
-          </a:bodyPr>
-          <a:lstStyle/>
-          <a:p>
-            <a:pPr algn="l">
-              <a:lnSpc>
-                <a:spcPct val="105000"/>
-              </a:lnSpc>
-            </a:pPr>
-            <a:r>
-              <a:rPr sz="1400" b="1" i="0">
-                <a:solidFill>
-                  <a:srgbClr val="3A5C9E"/>
-                </a:solidFill>
-                <a:latin typeface="Georgia"/>
-              </a:rPr>
-              <a:t>Q8</a:t>
-            </a:r>
-          </a:p>
-        </p:txBody>
-      </p:sp>
-      <p:sp>
-        <p:nvSpPr>
-          <p:cNvPr id="12" name="TextBox 11"/>
-          <p:cNvSpPr txBox="1"/>
-          <p:nvPr/>
-        </p:nvSpPr>
-        <p:spPr>
-          <a:xfrm>
-            <a:off x="1554480" y="2441448"/>
-            <a:ext cx="9875520" cy="603504"/>
-          </a:xfrm>
-          <a:prstGeom prst="rect">
-            <a:avLst/>
-          </a:prstGeom>
-          <a:noFill/>
-        </p:spPr>
-        <p:txBody>
-          <a:bodyPr wrap="square" lIns="0" tIns="0" rIns="0" bIns="0" anchor="t">
-            <a:spAutoFit/>
-          </a:bodyPr>
-          <a:lstStyle/>
-          <a:p>
-            <a:pPr algn="l">
-              <a:lnSpc>
-                <a:spcPct val="105000"/>
-              </a:lnSpc>
-            </a:pPr>
-            <a:r>
-              <a:rPr sz="1100" b="0" i="0">
-                <a:solidFill>
-                  <a:srgbClr val="1B2A41"/>
-                </a:solidFill>
-                <a:latin typeface="Calibri"/>
-              </a:rPr>
-              <a:t>How will you reduce hallucination? (This was asked in an Accenture strategy interview.)</a:t>
-            </a:r>
-          </a:p>
-          <a:p>
-            <a:pPr algn="l">
-              <a:lnSpc>
-                <a:spcPct val="105000"/>
-              </a:lnSpc>
-              <a:spcBef>
-                <a:spcPts val="200"/>
-              </a:spcBef>
-            </a:pPr>
-            <a:r>
-              <a:rPr sz="900" b="1" i="0">
-                <a:solidFill>
-                  <a:srgbClr val="C9A227"/>
-                </a:solidFill>
-                <a:latin typeface="Calibri"/>
-              </a:rPr>
-              <a:t>TIP  </a:t>
-            </a:r>
-            <a:r>
-              <a:rPr sz="900" b="0" i="0">
-                <a:solidFill>
-                  <a:srgbClr val="5D6B7E"/>
-                </a:solidFill>
-                <a:latin typeface="Calibri"/>
-              </a:rPr>
-              <a:t>Give it the document (RAG), demand a page citation for every number, allow “I don't know”, fix the output format, and check every number with code.</a:t>
-            </a:r>
-          </a:p>
-        </p:txBody>
-      </p:sp>
-      <p:sp>
-        <p:nvSpPr>
-          <p:cNvPr id="13" name="Rectangle 12"/>
-          <p:cNvSpPr/>
-          <p:nvPr/>
-        </p:nvSpPr>
-        <p:spPr>
-          <a:xfrm>
-            <a:off x="548640" y="3182112"/>
-            <a:ext cx="11091672" cy="731520"/>
-          </a:xfrm>
-          <a:prstGeom prst="rect">
-            <a:avLst/>
-          </a:prstGeom>
-          <a:solidFill>
-            <a:srgbClr val="FFFFFF"/>
-          </a:solidFill>
-          <a:ln>
-            <a:noFill/>
-          </a:ln>
-          <a:effectLst/>
-        </p:spPr>
-        <p:style>
-          <a:lnRef idx="1">
-            <a:schemeClr val="accent1"/>
-          </a:lnRef>
-          <a:fillRef idx="3">
-            <a:schemeClr val="accent1"/>
-          </a:fillRef>
-          <a:effectRef idx="2">
-            <a:schemeClr val="accent1"/>
-          </a:effectRef>
-          <a:fontRef idx="minor">
-            <a:schemeClr val="lt1"/>
-          </a:fontRef>
-        </p:style>
-        <p:txBody>
-          <a:bodyPr rtlCol="0" anchor="ctr"/>
-          <a:lstStyle/>
-          <a:p>
-            <a:pPr algn="ctr"/>
-            <a:endParaRPr/>
-          </a:p>
-        </p:txBody>
-      </p:sp>
-      <p:sp>
-        <p:nvSpPr>
-          <p:cNvPr id="14" name="Rectangle 13"/>
-          <p:cNvSpPr/>
-          <p:nvPr/>
-        </p:nvSpPr>
-        <p:spPr>
-          <a:xfrm>
-            <a:off x="548640" y="3182112"/>
-            <a:ext cx="64008" cy="731520"/>
-          </a:xfrm>
-          <a:prstGeom prst="rect">
-            <a:avLst/>
-          </a:prstGeom>
-          <a:solidFill>
-            <a:srgbClr val="3A5C9E"/>
-          </a:solidFill>
-          <a:ln>
-            <a:noFill/>
-          </a:ln>
-          <a:effectLst/>
-        </p:spPr>
-        <p:style>
-          <a:lnRef idx="1">
-            <a:schemeClr val="accent1"/>
-          </a:lnRef>
-          <a:fillRef idx="3">
-            <a:schemeClr val="accent1"/>
-          </a:fillRef>
-          <a:effectRef idx="2">
-            <a:schemeClr val="accent1"/>
-          </a:effectRef>
-          <a:fontRef idx="minor">
-            <a:schemeClr val="lt1"/>
-          </a:fontRef>
-        </p:style>
-        <p:txBody>
-          <a:bodyPr rtlCol="0" anchor="ctr"/>
-          <a:lstStyle/>
-          <a:p>
-            <a:pPr algn="ctr"/>
-            <a:endParaRPr/>
-          </a:p>
-        </p:txBody>
-      </p:sp>
-      <p:sp>
-        <p:nvSpPr>
-          <p:cNvPr id="15" name="TextBox 14"/>
-          <p:cNvSpPr txBox="1"/>
-          <p:nvPr/>
-        </p:nvSpPr>
-        <p:spPr>
-          <a:xfrm>
-            <a:off x="822960" y="3264408"/>
-            <a:ext cx="640080" cy="365760"/>
-          </a:xfrm>
-          <a:prstGeom prst="rect">
-            <a:avLst/>
-          </a:prstGeom>
-          <a:noFill/>
-        </p:spPr>
-        <p:txBody>
-          <a:bodyPr wrap="square" lIns="0" tIns="0" rIns="0" bIns="0" anchor="t">
-            <a:spAutoFit/>
-          </a:bodyPr>
-          <a:lstStyle/>
-          <a:p>
-            <a:pPr algn="l">
-              <a:lnSpc>
-                <a:spcPct val="105000"/>
-              </a:lnSpc>
-            </a:pPr>
-            <a:r>
-              <a:rPr sz="1400" b="1" i="0">
-                <a:solidFill>
-                  <a:srgbClr val="3A5C9E"/>
-                </a:solidFill>
-                <a:latin typeface="Georgia"/>
-              </a:rPr>
-              <a:t>Q9</a:t>
-            </a:r>
-          </a:p>
-        </p:txBody>
-      </p:sp>
-      <p:sp>
-        <p:nvSpPr>
-          <p:cNvPr id="16" name="TextBox 15"/>
-          <p:cNvSpPr txBox="1"/>
-          <p:nvPr/>
-        </p:nvSpPr>
-        <p:spPr>
-          <a:xfrm>
-            <a:off x="1554480" y="3246120"/>
-            <a:ext cx="9875520" cy="603504"/>
-          </a:xfrm>
-          <a:prstGeom prst="rect">
-            <a:avLst/>
-          </a:prstGeom>
-          <a:noFill/>
-        </p:spPr>
-        <p:txBody>
-          <a:bodyPr wrap="square" lIns="0" tIns="0" rIns="0" bIns="0" anchor="t">
-            <a:spAutoFit/>
-          </a:bodyPr>
-          <a:lstStyle/>
-          <a:p>
-            <a:pPr algn="l">
-              <a:lnSpc>
-                <a:spcPct val="105000"/>
-              </a:lnSpc>
-            </a:pPr>
-            <a:r>
-              <a:rPr sz="1100" b="0" i="0">
-                <a:solidFill>
-                  <a:srgbClr val="1B2A41"/>
-                </a:solidFill>
-                <a:latin typeface="Calibri"/>
-              </a:rPr>
-              <a:t>You are a research analyst valuing Zomato for a long-term horizon. Write the best prompt in CRAFT format.</a:t>
-            </a:r>
-          </a:p>
-          <a:p>
-            <a:pPr algn="l">
-              <a:lnSpc>
-                <a:spcPct val="105000"/>
-              </a:lnSpc>
-              <a:spcBef>
-                <a:spcPts val="200"/>
-              </a:spcBef>
-            </a:pPr>
-            <a:r>
-              <a:rPr sz="900" b="1" i="0">
-                <a:solidFill>
-                  <a:srgbClr val="C9A227"/>
-                </a:solidFill>
-                <a:latin typeface="Calibri"/>
-              </a:rPr>
-              <a:t>TIP  </a:t>
-            </a:r>
-            <a:r>
-              <a:rPr sz="900" b="0" i="0">
-                <a:solidFill>
-                  <a:srgbClr val="5D6B7E"/>
-                </a:solidFill>
-                <a:latin typeface="Calibri"/>
-              </a:rPr>
-              <a:t>Context: Zomato, latest annual results, long-term view. Role: equity research analyst. Action: value it by DCF and peer multiples, list the risks. Format: one-page memo with a table. Tone: plain, board-ready.</a:t>
-            </a:r>
-          </a:p>
-        </p:txBody>
-      </p:sp>
-      <p:sp>
-        <p:nvSpPr>
-          <p:cNvPr id="17" name="Rectangle 16"/>
-          <p:cNvSpPr/>
-          <p:nvPr/>
-        </p:nvSpPr>
-        <p:spPr>
-          <a:xfrm>
-            <a:off x="548640" y="3986784"/>
-            <a:ext cx="11091672" cy="731520"/>
-          </a:xfrm>
-          <a:prstGeom prst="rect">
-            <a:avLst/>
-          </a:prstGeom>
-          <a:solidFill>
-            <a:srgbClr val="FFFFFF"/>
-          </a:solidFill>
-          <a:ln>
-            <a:noFill/>
-          </a:ln>
-          <a:effectLst/>
-        </p:spPr>
-        <p:style>
-          <a:lnRef idx="1">
-            <a:schemeClr val="accent1"/>
-          </a:lnRef>
-          <a:fillRef idx="3">
-            <a:schemeClr val="accent1"/>
-          </a:fillRef>
-          <a:effectRef idx="2">
-            <a:schemeClr val="accent1"/>
-          </a:effectRef>
-          <a:fontRef idx="minor">
-            <a:schemeClr val="lt1"/>
-          </a:fontRef>
-        </p:style>
-        <p:txBody>
-          <a:bodyPr rtlCol="0" anchor="ctr"/>
-          <a:lstStyle/>
-          <a:p>
-            <a:pPr algn="ctr"/>
-            <a:endParaRPr/>
-          </a:p>
-        </p:txBody>
-      </p:sp>
-      <p:sp>
-        <p:nvSpPr>
-          <p:cNvPr id="18" name="Rectangle 17"/>
-          <p:cNvSpPr/>
-          <p:nvPr/>
-        </p:nvSpPr>
-        <p:spPr>
-          <a:xfrm>
-            <a:off x="548640" y="3986784"/>
-            <a:ext cx="64008" cy="731520"/>
-          </a:xfrm>
-          <a:prstGeom prst="rect">
-            <a:avLst/>
-          </a:prstGeom>
-          <a:solidFill>
-            <a:srgbClr val="3A5C9E"/>
-          </a:solidFill>
-          <a:ln>
-            <a:noFill/>
-          </a:ln>
-          <a:effectLst/>
-        </p:spPr>
-        <p:style>
-          <a:lnRef idx="1">
-            <a:schemeClr val="accent1"/>
-          </a:lnRef>
-          <a:fillRef idx="3">
-            <a:schemeClr val="accent1"/>
-          </a:fillRef>
-          <a:effectRef idx="2">
-            <a:schemeClr val="accent1"/>
-          </a:effectRef>
-          <a:fontRef idx="minor">
-            <a:schemeClr val="lt1"/>
-          </a:fontRef>
-        </p:style>
-        <p:txBody>
-          <a:bodyPr rtlCol="0" anchor="ctr"/>
-          <a:lstStyle/>
-          <a:p>
-            <a:pPr algn="ctr"/>
-            <a:endParaRPr/>
-          </a:p>
-        </p:txBody>
-      </p:sp>
-      <p:sp>
-        <p:nvSpPr>
-          <p:cNvPr id="19" name="TextBox 18"/>
-          <p:cNvSpPr txBox="1"/>
-          <p:nvPr/>
-        </p:nvSpPr>
-        <p:spPr>
-          <a:xfrm>
-            <a:off x="822960" y="4069080"/>
-            <a:ext cx="640080" cy="365760"/>
-          </a:xfrm>
-          <a:prstGeom prst="rect">
-            <a:avLst/>
-          </a:prstGeom>
-          <a:noFill/>
-        </p:spPr>
-        <p:txBody>
-          <a:bodyPr wrap="square" lIns="0" tIns="0" rIns="0" bIns="0" anchor="t">
-            <a:spAutoFit/>
-          </a:bodyPr>
-          <a:lstStyle/>
-          <a:p>
-            <a:pPr algn="l">
-              <a:lnSpc>
-                <a:spcPct val="105000"/>
-              </a:lnSpc>
-            </a:pPr>
-            <a:r>
-              <a:rPr sz="1400" b="1" i="0">
-                <a:solidFill>
-                  <a:srgbClr val="3A5C9E"/>
-                </a:solidFill>
-                <a:latin typeface="Georgia"/>
-              </a:rPr>
-              <a:t>Q10</a:t>
-            </a:r>
-          </a:p>
-        </p:txBody>
-      </p:sp>
-      <p:sp>
-        <p:nvSpPr>
-          <p:cNvPr id="20" name="TextBox 19"/>
-          <p:cNvSpPr txBox="1"/>
-          <p:nvPr/>
-        </p:nvSpPr>
-        <p:spPr>
-          <a:xfrm>
-            <a:off x="1554480" y="4050792"/>
-            <a:ext cx="9875520" cy="603504"/>
-          </a:xfrm>
-          <a:prstGeom prst="rect">
-            <a:avLst/>
-          </a:prstGeom>
-          <a:noFill/>
-        </p:spPr>
-        <p:txBody>
-          <a:bodyPr wrap="square" lIns="0" tIns="0" rIns="0" bIns="0" anchor="t">
-            <a:spAutoFit/>
-          </a:bodyPr>
-          <a:lstStyle/>
-          <a:p>
-            <a:pPr algn="l">
-              <a:lnSpc>
-                <a:spcPct val="105000"/>
-              </a:lnSpc>
-            </a:pPr>
-            <a:r>
-              <a:rPr sz="1100" b="0" i="0">
-                <a:solidFill>
-                  <a:srgbClr val="1B2A41"/>
-                </a:solidFill>
-                <a:latin typeface="Calibri"/>
-              </a:rPr>
-              <a:t>How will you build a RAG pipeline for the 550-page Shiprocket DRHP, which would cost over a million tokens to paste? List the steps.</a:t>
-            </a:r>
-          </a:p>
-          <a:p>
-            <a:pPr algn="l">
-              <a:lnSpc>
-                <a:spcPct val="105000"/>
-              </a:lnSpc>
-              <a:spcBef>
-                <a:spcPts val="200"/>
-              </a:spcBef>
-            </a:pPr>
-            <a:r>
-              <a:rPr sz="900" b="1" i="0">
-                <a:solidFill>
-                  <a:srgbClr val="C9A227"/>
-                </a:solidFill>
-                <a:latin typeface="Calibri"/>
-              </a:rPr>
-              <a:t>TIP  </a:t>
-            </a:r>
-            <a:r>
-              <a:rPr sz="900" b="0" i="0">
-                <a:solidFill>
-                  <a:srgbClr val="5D6B7E"/>
-                </a:solidFill>
-                <a:latin typeface="Calibri"/>
-              </a:rPr>
-              <a:t>Load the PDF, chunk it by section, embed each chunk, store the vectors in a database, retrieve the top chunks for each question, and generate the answer with page citations.</a:t>
-            </a:r>
-          </a:p>
-        </p:txBody>
-      </p:sp>
-      <p:sp>
-        <p:nvSpPr>
-          <p:cNvPr id="29" name="TextBox 28"/>
-          <p:cNvSpPr txBox="1"/>
-          <p:nvPr/>
-        </p:nvSpPr>
-        <p:spPr>
-          <a:xfrm>
-            <a:off x="548640" y="6446520"/>
-            <a:ext cx="8229600" cy="274320"/>
-          </a:xfrm>
-          <a:prstGeom prst="rect">
-            <a:avLst/>
-          </a:prstGeom>
-          <a:noFill/>
-        </p:spPr>
-        <p:txBody>
-          <a:bodyPr wrap="square" lIns="0" tIns="0" rIns="0" bIns="0" anchor="t">
-            <a:spAutoFit/>
-          </a:bodyPr>
-          <a:lstStyle/>
-          <a:p>
-            <a:pPr algn="l">
-              <a:lnSpc>
-                <a:spcPct val="105000"/>
-              </a:lnSpc>
-            </a:pPr>
-            <a:r>
-              <a:rPr sz="850" b="0" i="0">
-                <a:solidFill>
-                  <a:srgbClr val="5D6B7E"/>
-                </a:solidFill>
-              </a:rPr>
-              <a:t>The tip is the shape of the answer, not the whole answer. Two or three sentences each in the exam.</a:t>
-            </a:r>
-          </a:p>
-        </p:txBody>
-      </p:sp>
-      <p:sp>
-        <p:nvSpPr>
-          <p:cNvPr id="30" name="TextBox 29"/>
-          <p:cNvSpPr txBox="1"/>
-          <p:nvPr/>
-        </p:nvSpPr>
-        <p:spPr>
-          <a:xfrm>
-            <a:off x="9262872" y="6473952"/>
-            <a:ext cx="2377440" cy="228600"/>
-          </a:xfrm>
-          <a:prstGeom prst="rect">
-            <a:avLst/>
-          </a:prstGeom>
-          <a:noFill/>
-        </p:spPr>
-        <p:txBody>
-          <a:bodyPr wrap="square" lIns="0" tIns="0" rIns="0" bIns="0" anchor="t">
-            <a:spAutoFit/>
-          </a:bodyPr>
-          <a:lstStyle/>
-          <a:p>
-            <a:pPr algn="r">
-              <a:lnSpc>
-                <a:spcPct val="105000"/>
-              </a:lnSpc>
-            </a:pPr>
-            <a:r>
-              <a:rPr sz="800" b="0" i="0">
-                <a:solidFill>
-                  <a:srgbClr val="5D6B7E"/>
-                </a:solidFill>
-              </a:rPr>
-              <a:t>MODULE 2  ·  12</a:t>
             </a:r>
           </a:p>
         </p:txBody>

--- a/slides/Module-02-Prompt-Engineering-and-RAG.pptx
+++ b/slides/Module-02-Prompt-Engineering-and-RAG.pptx
@@ -6549,46 +6549,7 @@
                   <a:srgbClr val="C9A227"/>
                 </a:solidFill>
               </a:rPr>
-              <a:t>PRACTICE QUESTIONS · PART A, CONTINUED</a:t>
-            </a:r>
-          </a:p>
-        </p:txBody>
-      </p:sp>
-      <p:sp>
-        <p:nvSpPr>
-          <p:cNvPr id="4" name="TextBox 3"/>
-          <p:cNvSpPr txBox="1"/>
-          <p:nvPr/>
-        </p:nvSpPr>
-        <p:spPr>
-          <a:xfrm>
-            <a:off x="548640" y="621792"/>
-            <a:ext cx="11091672" cy="731520"/>
-          </a:xfrm>
-          <a:prstGeom prst="rect">
-            <a:avLst/>
-          </a:prstGeom>
-          <a:noFill/>
-        </p:spPr>
-        <p:txBody>
-          <a:bodyPr wrap="square" lIns="0" tIns="0" rIns="0" bIns="0" anchor="t">
-            <a:spAutoFit/>
-          </a:bodyPr>
-          <a:lstStyle/>
-          <a:p>
-            <a:pPr algn="l">
-              <a:lnSpc>
-                <a:spcPct val="105000"/>
-              </a:lnSpc>
-            </a:pPr>
-            <a:r>
-              <a:rPr sz="2900" b="1" i="0">
-                <a:solidFill>
-                  <a:srgbClr val="0F2145"/>
-                </a:solidFill>
-                <a:latin typeface="Georgia"/>
-              </a:rPr>
-              <a:t>Four more on today's basics</a:t>
+              <a:t>PRACTICE QUESTIONS · PART A</a:t>
             </a:r>
           </a:p>
         </p:txBody>
@@ -6601,7 +6562,7 @@
         </p:nvSpPr>
         <p:spPr>
           <a:xfrm>
-            <a:off x="548640" y="1572768"/>
+            <a:off x="548640" y="914400"/>
             <a:ext cx="11091672" cy="731520"/>
           </a:xfrm>
           <a:prstGeom prst="rect">
@@ -6646,7 +6607,7 @@
         </p:nvSpPr>
         <p:spPr>
           <a:xfrm>
-            <a:off x="548640" y="1572768"/>
+            <a:off x="548640" y="914400"/>
             <a:ext cx="64008" cy="731520"/>
           </a:xfrm>
           <a:prstGeom prst="rect">
@@ -6691,7 +6652,7 @@
         </p:nvSpPr>
         <p:spPr>
           <a:xfrm>
-            <a:off x="822960" y="1655064"/>
+            <a:off x="822960" y="996696"/>
             <a:ext cx="640080" cy="365760"/>
           </a:xfrm>
           <a:prstGeom prst="rect">
@@ -6730,7 +6691,7 @@
         </p:nvSpPr>
         <p:spPr>
           <a:xfrm>
-            <a:off x="1554480" y="1636776"/>
+            <a:off x="1554480" y="978408"/>
             <a:ext cx="9875520" cy="603504"/>
           </a:xfrm>
           <a:prstGeom prst="rect">
@@ -6797,7 +6758,7 @@
         </p:nvSpPr>
         <p:spPr>
           <a:xfrm>
-            <a:off x="548640" y="2377440"/>
+            <a:off x="548640" y="1719072"/>
             <a:ext cx="11091672" cy="731520"/>
           </a:xfrm>
           <a:prstGeom prst="rect">
@@ -6842,7 +6803,7 @@
         </p:nvSpPr>
         <p:spPr>
           <a:xfrm>
-            <a:off x="548640" y="2377440"/>
+            <a:off x="548640" y="1719072"/>
             <a:ext cx="64008" cy="731520"/>
           </a:xfrm>
           <a:prstGeom prst="rect">
@@ -6887,7 +6848,7 @@
         </p:nvSpPr>
         <p:spPr>
           <a:xfrm>
-            <a:off x="822960" y="2459736"/>
+            <a:off x="822960" y="1801368"/>
             <a:ext cx="640080" cy="365760"/>
           </a:xfrm>
           <a:prstGeom prst="rect">
@@ -6926,7 +6887,7 @@
         </p:nvSpPr>
         <p:spPr>
           <a:xfrm>
-            <a:off x="1554480" y="2441448"/>
+            <a:off x="1554480" y="1783080"/>
             <a:ext cx="9875520" cy="603504"/>
           </a:xfrm>
           <a:prstGeom prst="rect">
@@ -6993,7 +6954,7 @@
         </p:nvSpPr>
         <p:spPr>
           <a:xfrm>
-            <a:off x="548640" y="3182112"/>
+            <a:off x="548640" y="2523744"/>
             <a:ext cx="11091672" cy="731520"/>
           </a:xfrm>
           <a:prstGeom prst="rect">
@@ -7038,7 +6999,7 @@
         </p:nvSpPr>
         <p:spPr>
           <a:xfrm>
-            <a:off x="548640" y="3182112"/>
+            <a:off x="548640" y="2523744"/>
             <a:ext cx="64008" cy="731520"/>
           </a:xfrm>
           <a:prstGeom prst="rect">
@@ -7083,7 +7044,7 @@
         </p:nvSpPr>
         <p:spPr>
           <a:xfrm>
-            <a:off x="822960" y="3264408"/>
+            <a:off x="822960" y="2606040"/>
             <a:ext cx="640080" cy="365760"/>
           </a:xfrm>
           <a:prstGeom prst="rect">
@@ -7122,7 +7083,7 @@
         </p:nvSpPr>
         <p:spPr>
           <a:xfrm>
-            <a:off x="1554480" y="3246120"/>
+            <a:off x="1554480" y="2587752"/>
             <a:ext cx="9875520" cy="603504"/>
           </a:xfrm>
           <a:prstGeom prst="rect">
@@ -7189,7 +7150,7 @@
         </p:nvSpPr>
         <p:spPr>
           <a:xfrm>
-            <a:off x="548640" y="3986784"/>
+            <a:off x="548640" y="3328416"/>
             <a:ext cx="11091672" cy="731520"/>
           </a:xfrm>
           <a:prstGeom prst="rect">
@@ -7234,7 +7195,7 @@
         </p:nvSpPr>
         <p:spPr>
           <a:xfrm>
-            <a:off x="548640" y="3986784"/>
+            <a:off x="548640" y="3328416"/>
             <a:ext cx="64008" cy="731520"/>
           </a:xfrm>
           <a:prstGeom prst="rect">
@@ -7279,7 +7240,7 @@
         </p:nvSpPr>
         <p:spPr>
           <a:xfrm>
-            <a:off x="822960" y="4069080"/>
+            <a:off x="822960" y="3410712"/>
             <a:ext cx="640080" cy="365760"/>
           </a:xfrm>
           <a:prstGeom prst="rect">
@@ -7318,7 +7279,7 @@
         </p:nvSpPr>
         <p:spPr>
           <a:xfrm>
-            <a:off x="1554480" y="4050792"/>
+            <a:off x="1554480" y="3392424"/>
             <a:ext cx="9875520" cy="603504"/>
           </a:xfrm>
           <a:prstGeom prst="rect">
